--- a/slaydlar/M13.pptx
+++ b/slaydlar/M13.pptx
@@ -21,6 +21,7 @@
     <p:sldId id="269" r:id="rId21"/>
     <p:sldId id="270" r:id="rId22"/>
     <p:sldId id="271" r:id="rId23"/>
+    <p:sldId id="272" r:id="rId24"/>
   </p:sldIdLst>
   <p:sldSz cx="12192000" cy="6858000" type="screen4x3"/>
   <p:notesSz cx="6858000" cy="9144000"/>
@@ -917,13 +918,55 @@
           <a:lstStyle/>
           <a:p>
             <a:r>
-              <a:t>Avtonom hisoblash (autonomic computing) g'oyasini 2001-yilda IBM ilgari surgan; Kephart va Chess (2003) uni to'rtta «o'z-o'zini» xususiyati orqali ta'riflagan: o'z-o'zini sozlash (self-configuration), o'z-o'zini optimallashtirish (self-optimization), o'z-o'zini tiklash (self-healing) va o'z-o'zini himoyalash (self-protection). Bu xususiyatlarni amalga oshiruvchi standart naqsh — MAPE-K halqasi: Monitor (sensorlardan ma'lumot yig'ish), Analyze (holatni tahlil qilish, anomaliya va trendni aniqlash), Plan (harakat rejasini tuzish), Execute (ijro mexanizmlari orqali ta'sir) va bularning barchasi umumiy Knowledge (bilim bazasi: modellar, qoidalar, tarix) ustida ishlaydi.</a:t>
+              <a:t>Raqamli egizak konsepsiyasini 2002-yilda Michigan universitetida Michael Grieves mahsulot hayot siklini boshqarish kursida taklif qilgan; atamaning o'zi keyinroq NASA mutaxassislari bilan hamkorlikda mustahkamlandi. Grieves va Vickers (2017) ta'rifiga ko'ra, raqamli egizak uch qismdan iborat: fizik makondagi real obyekt, virtual makondagi uning nusxasi va ikkalasini bog'lovchi ikki tomonlama ma'lumot va axborot oqimi. Aynan shu uchinchi qism — uzluksiz va ikki tomonlama bog'lanish — egizakni oddiy simulyatsiya modelidan ajratadi: simulyatsiya «agar shunday bo'lsa» savoliga javob beradi, egizak esa «hozir aynan shu obyekt bilan nima bo'lyapti va nima bo'ladi» savoliga.</a:t>
             </a:r>
           </a:p>
           <a:p/>
           <a:p>
             <a:r>
-              <a:t>MAPE-K halqasi bilan raqamli egizak o'rtasidagi bog'liqlik bevosita: egizak — bu halqaning Knowledge va Analyze qismining materiallashgan ko'rinishi. Avtonomlik darajasini belgilashda SAE J3016 ga o'xshash shkala foydali: 0 — faqat ko'rsatish; 1 — tavsiya, inson tasdiqlaydi; 2 — tizim bajaradi, inson kuzatadi va bekor qila oladi (human-on-the-loop); 3 — tizim bajaradi, insonga faqat hisobot beradi; 4 — to'liq avtonom. Sanoatda SI asosidagi tizimlar odatda 1–2 darajadan boshlanadi va ishonch to'plangan sari ko'tariladi. Muhim muhandislik tamoyili: SI komponenti avtonomlik darajasidan qat'i nazar, an'anaviy, sertifikatlangan himoya halqasini (IEC 61508 / IEC 61511 bo'yicha funksional xavfsizlik) hech qachon almashtirmasligi kerak — u faqat uning ustiga qo'shiladi.</a:t>
+              <a:t>ISO 23247 seriyasi (ishlab chiqarish uchun raqamli egizak asoslari) egizak arxitekturasini to'rt domenga bo'ladi: kuzatiladigan ishlab chiqarish elementlari, ma'lumot yig'ish va qurilma boshqaruvi, raqamli egizak yadrosi (modellashtirish, sinxronizatsiya, tahlil) va foydalanuvchi domeni. Sanoat platformalari — Siemens Insights Hub (avvalgi MindSphere), Azure Digital Twins (DTDL tavsif tili bilan), AWS IoT TwinMaker, NVIDIA Omniverse — aynan shu domenlarga mos xizmatlarni taqdim etadi.</a:t>
+            </a:r>
+          </a:p>
+          <a:p/>
+          <a:p>
+            <a:r>
+              <a:t>Raqamli egizakning yetuklik darajalarini quyidagicha bosqichlash qulay:</a:t>
+            </a:r>
+          </a:p>
+          <a:p/>
+          <a:p>
+            <a:r>
+              <a:t>Tavsiflovchi (descriptive) egizak — obyektning joriy holatini 3D yoki sxema ko'rinishida real vaqtda aks ettiradi.</a:t>
+            </a:r>
+          </a:p>
+          <a:p/>
+          <a:p>
+            <a:r>
+              <a:t>Diagnostik (diagnostic) egizak — me'yordan chetlanishni aniqlaydi va sababini lokalizatsiya qiladi.</a:t>
+            </a:r>
+          </a:p>
+          <a:p/>
+          <a:p>
+            <a:r>
+              <a:t>Bashoratli (predictive) egizak — qolgan foydali resurs (Remaining Useful Life, RUL) va nosozlik ehtimolini baholaydi.</a:t>
+            </a:r>
+          </a:p>
+          <a:p/>
+          <a:p>
+            <a:r>
+              <a:t>Buyuruvchi (prescriptive) egizak — optimal harakatni taklif qiladi, odatda stsenariylar simulyatsiyasi orqali.</a:t>
+            </a:r>
+          </a:p>
+          <a:p/>
+          <a:p>
+            <a:r>
+              <a:t>Avtonom (autonomous) egizak — inson ishtirokisiz fizik obyektni qayta sozlaydi.</a:t>
+            </a:r>
+          </a:p>
+          <a:p/>
+          <a:p>
+            <a:r>
+              <a:t>Model turi nuqtai nazaridan uchta yondashuv bor. Fizikaga asoslangan egizak (physics-based) differensial tenglamalar yoki muhandislik formulalariga tayanadi — masalan, nasos uchun o'xshashlik qonunlari: sarf aylanish tezligiga chiziqli (Q ~ n), bosim kvadratik (H ~ n^2), quvvat kubik (P ~ n^3) bog'liq. Ma'lumotga asoslangan egizak (data-driven) tarixiy sensor ma'lumotlaridan o'rganadi. Gibrid egizak (hybrid, ba'zan «physics-informed») fizik modelning qoldig'ini (residual), ya'ni kuzatilgan va fizik model bashorat qilgan qiymat farqini ML bilan modellashtiradi. Amaliyotda gibrid yondashuv eng barqaror hisoblanadi: fizik qism umumlashtirish va tushuntirilishni, ML qism esa fizik modelga kirmagan omillarni (eskirish, ifloslanish, o'rnatish xatolari) qamrab oladi. Bizning amaliy misolimiz aynan gibrid egizakka asoslanadi.</a:t>
             </a:r>
           </a:p>
         </p:txBody>
@@ -949,6 +992,82 @@
 </file>
 
 <file path=ppt/notesSlides/notesSlide6.xml><?xml version="1.0" encoding="utf-8"?>
+<p:notes xmlns:a="http://schemas.openxmlformats.org/drawingml/2006/main" xmlns:p="http://schemas.openxmlformats.org/presentationml/2006/main" xmlns:r="http://schemas.openxmlformats.org/officeDocument/2006/relationships">
+  <p:cSld>
+    <p:spTree>
+      <p:nvGrpSpPr>
+        <p:cNvPr id="1" name=""/>
+        <p:cNvGrpSpPr/>
+        <p:nvPr/>
+      </p:nvGrpSpPr>
+      <p:grpSpPr>
+        <a:xfrm>
+          <a:off x="0" y="0"/>
+          <a:ext cx="0" cy="0"/>
+          <a:chOff x="0" y="0"/>
+          <a:chExt cx="0" cy="0"/>
+        </a:xfrm>
+      </p:grpSpPr>
+      <p:sp>
+        <p:nvSpPr>
+          <p:cNvPr id="2" name="Slide Image Placeholder 1"/>
+          <p:cNvSpPr>
+            <a:spLocks noGrp="1"/>
+          </p:cNvSpPr>
+          <p:nvPr>
+            <p:ph type="sldImg" idx="2"/>
+          </p:nvPr>
+        </p:nvSpPr>
+        <p:spPr/>
+      </p:sp>
+      <p:sp>
+        <p:nvSpPr>
+          <p:cNvPr id="3" name="Notes Placeholder 2"/>
+          <p:cNvSpPr>
+            <a:spLocks noGrp="1"/>
+          </p:cNvSpPr>
+          <p:nvPr>
+            <p:ph type="body" idx="3" sz="quarter"/>
+          </p:nvPr>
+        </p:nvSpPr>
+        <p:spPr/>
+        <p:txBody>
+          <a:bodyPr/>
+          <a:lstStyle/>
+          <a:p>
+            <a:r>
+              <a:t>Avtonom hisoblash (autonomic computing) g'oyasini 2001-yilda IBM ilgari surgan; Kephart va Chess (2003) uni to'rtta «o'z-o'zini» xususiyati orqali ta'riflagan: o'z-o'zini sozlash (self-configuration), o'z-o'zini optimallashtirish (self-optimization), o'z-o'zini tiklash (self-healing) va o'z-o'zini himoyalash (self-protection). Bu xususiyatlarni amalga oshiruvchi standart naqsh — MAPE-K halqasi: Monitor (sensorlardan ma'lumot yig'ish), Analyze (holatni tahlil qilish, anomaliya va trendni aniqlash), Plan (harakat rejasini tuzish), Execute (ijro mexanizmlari orqali ta'sir) va bularning barchasi umumiy Knowledge (bilim bazasi: modellar, qoidalar, tarix) ustida ishlaydi.</a:t>
+            </a:r>
+          </a:p>
+          <a:p/>
+          <a:p>
+            <a:r>
+              <a:t>MAPE-K halqasi bilan raqamli egizak o'rtasidagi bog'liqlik bevosita: egizak — bu halqaning Knowledge va Analyze qismining materiallashgan ko'rinishi. Avtonomlik darajasini belgilashda SAE J3016 ga o'xshash shkala foydali: 0 — faqat ko'rsatish; 1 — tavsiya, inson tasdiqlaydi; 2 — tizim bajaradi, inson kuzatadi va bekor qila oladi (human-on-the-loop); 3 — tizim bajaradi, insonga faqat hisobot beradi; 4 — to'liq avtonom. Sanoatda SI asosidagi tizimlar odatda 1–2 darajadan boshlanadi va ishonch to'plangan sari ko'tariladi. Muhim muhandislik tamoyili: SI komponenti avtonomlik darajasidan qat'i nazar, an'anaviy, sertifikatlangan himoya halqasini (IEC 61508 / IEC 61511 bo'yicha funksional xavfsizlik) hech qachon almashtirmasligi kerak — u faqat uning ustiga qo'shiladi.</a:t>
+            </a:r>
+          </a:p>
+        </p:txBody>
+      </p:sp>
+      <p:sp>
+        <p:nvSpPr>
+          <p:cNvPr id="4" name="Slide Number Placeholder 3"/>
+          <p:cNvSpPr>
+            <a:spLocks noGrp="1"/>
+          </p:cNvSpPr>
+          <p:nvPr>
+            <p:ph type="sldNum" idx="5" sz="quarter"/>
+          </p:nvPr>
+        </p:nvSpPr>
+        <p:spPr/>
+      </p:sp>
+    </p:spTree>
+  </p:cSld>
+  <p:clrMapOvr>
+    <a:masterClrMapping/>
+  </p:clrMapOvr>
+</p:notes>
+</file>
+
+<file path=ppt/notesSlides/notesSlide7.xml><?xml version="1.0" encoding="utf-8"?>
 <p:notes xmlns:a="http://schemas.openxmlformats.org/drawingml/2006/main" xmlns:p="http://schemas.openxmlformats.org/presentationml/2006/main" xmlns:r="http://schemas.openxmlformats.org/officeDocument/2006/relationships">
   <p:cSld>
     <p:spTree>
@@ -5668,7 +5787,7 @@
                 </a:solidFill>
                 <a:latin typeface="Calibri"/>
               </a:rPr>
-              <a:t>Raqamli egizak (Digital Twin) texnologiyalari (1)</a:t>
+              <a:t>Raqamli egizak (Digital Twin) texnologiyalari</a:t>
             </a:r>
           </a:p>
         </p:txBody>
@@ -5795,12 +5914,12 @@
         </p:nvSpPr>
         <p:spPr>
           <a:xfrm>
-            <a:off x="550000" y="1300000"/>
-            <a:ext cx="11100000" cy="894000"/>
+            <a:off x="550000" y="1250000"/>
+            <a:ext cx="11100000" cy="1180000"/>
           </a:xfrm>
           <a:prstGeom prst="roundRect">
             <a:avLst>
-              <a:gd name="adj" fmla="val 18000"/>
+              <a:gd name="adj" fmla="val 8000"/>
             </a:avLst>
           </a:prstGeom>
           <a:solidFill>
@@ -5841,8 +5960,8 @@
         </p:nvSpPr>
         <p:spPr>
           <a:xfrm>
-            <a:off x="550000" y="1300000"/>
-            <a:ext cx="70000" cy="894000"/>
+            <a:off x="550000" y="1250000"/>
+            <a:ext cx="70000" cy="1180000"/>
           </a:xfrm>
           <a:prstGeom prst="rect">
             <a:avLst/>
@@ -5885,8 +6004,8 @@
         </p:nvSpPr>
         <p:spPr>
           <a:xfrm>
-            <a:off x="800000" y="1517000"/>
-            <a:ext cx="460000" cy="460000"/>
+            <a:off x="780000" y="1630000"/>
+            <a:ext cx="420000" cy="420000"/>
           </a:xfrm>
           <a:prstGeom prst="ellipse">
             <a:avLst/>
@@ -5919,7 +6038,7 @@
           <a:p>
             <a:pPr algn="ctr"/>
             <a:r>
-              <a:rPr sz="1600" b="1">
+              <a:rPr sz="1400" b="1">
                 <a:solidFill>
                   <a:srgbClr val="FFFFFF"/>
                 </a:solidFill>
@@ -5938,8 +6057,8 @@
         </p:nvSpPr>
         <p:spPr>
           <a:xfrm>
-            <a:off x="1450000" y="1300000"/>
-            <a:ext cx="10050000" cy="894000"/>
+            <a:off x="1380000" y="1290000"/>
+            <a:ext cx="10150000" cy="1100000"/>
           </a:xfrm>
           <a:prstGeom prst="rect">
             <a:avLst/>
@@ -5947,20 +6066,35 @@
           <a:noFill/>
         </p:spPr>
         <p:txBody>
-          <a:bodyPr wrap="square" anchor="ctr" lIns="50800" rIns="50800">
+          <a:bodyPr wrap="square" anchor="ctr">
             <a:spAutoFit/>
           </a:bodyPr>
           <a:lstStyle/>
           <a:p>
-            <a:pPr algn="l"/>
             <a:r>
-              <a:rPr sz="1400" b="0">
+              <a:rPr sz="1500" b="1">
                 <a:solidFill>
-                  <a:srgbClr val="1B2430"/>
+                  <a:srgbClr val="1F3A5F"/>
                 </a:solidFill>
                 <a:latin typeface="Calibri"/>
               </a:rPr>
-              <a:t>Raqamli egizak konsepsiyasini 2002-yilda Michigan universitetida Michael Grieves mahsulot hayot siklini boshqarish kursida taklif qilgan; atamaning o'zi keyinroq NASA mutaxassislari bilan…</a:t>
+              <a:t>Raqamli egizak konsepsiyasini 2002-yilda Michigan universitetida Michael Grieves mahsulot hayot siklini boshqarish kursida taklif qilgan; atamaning o'zi keyinroq NASA mutaxassislari bilan hamkorlikda mustahkamlandi.</a:t>
+            </a:r>
+          </a:p>
+          <a:p>
+            <a:pPr>
+              <a:spcBef>
+                <a:spcPts val="400"/>
+              </a:spcBef>
+            </a:pPr>
+            <a:r>
+              <a:rPr sz="1400">
+                <a:solidFill>
+                  <a:srgbClr val="334055"/>
+                </a:solidFill>
+                <a:latin typeface="Calibri"/>
+              </a:rPr>
+              <a:t>Grieves va Vickers (2017) ta'rifiga ko'ra, raqamli egizak uch qismdan iborat: fizik makondagi real obyekt, virtual makondagi uning nusxasi va ikkalasini bog'lovchi ikki tomonlama ma'lumot va axborot oqimi.</a:t>
             </a:r>
           </a:p>
         </p:txBody>
@@ -5973,12 +6107,12 @@
         </p:nvSpPr>
         <p:spPr>
           <a:xfrm>
-            <a:off x="550000" y="2314000"/>
-            <a:ext cx="11100000" cy="894000"/>
+            <a:off x="550000" y="2540000"/>
+            <a:ext cx="11100000" cy="1180000"/>
           </a:xfrm>
           <a:prstGeom prst="roundRect">
             <a:avLst>
-              <a:gd name="adj" fmla="val 18000"/>
+              <a:gd name="adj" fmla="val 8000"/>
             </a:avLst>
           </a:prstGeom>
           <a:solidFill>
@@ -6019,8 +6153,8 @@
         </p:nvSpPr>
         <p:spPr>
           <a:xfrm>
-            <a:off x="550000" y="2314000"/>
-            <a:ext cx="70000" cy="894000"/>
+            <a:off x="550000" y="2540000"/>
+            <a:ext cx="70000" cy="1180000"/>
           </a:xfrm>
           <a:prstGeom prst="rect">
             <a:avLst/>
@@ -6063,8 +6197,8 @@
         </p:nvSpPr>
         <p:spPr>
           <a:xfrm>
-            <a:off x="800000" y="2531000"/>
-            <a:ext cx="460000" cy="460000"/>
+            <a:off x="780000" y="2920000"/>
+            <a:ext cx="420000" cy="420000"/>
           </a:xfrm>
           <a:prstGeom prst="ellipse">
             <a:avLst/>
@@ -6097,7 +6231,7 @@
           <a:p>
             <a:pPr algn="ctr"/>
             <a:r>
-              <a:rPr sz="1600" b="1">
+              <a:rPr sz="1400" b="1">
                 <a:solidFill>
                   <a:srgbClr val="FFFFFF"/>
                 </a:solidFill>
@@ -6116,8 +6250,8 @@
         </p:nvSpPr>
         <p:spPr>
           <a:xfrm>
-            <a:off x="1450000" y="2314000"/>
-            <a:ext cx="10050000" cy="894000"/>
+            <a:off x="1380000" y="2580000"/>
+            <a:ext cx="10150000" cy="1100000"/>
           </a:xfrm>
           <a:prstGeom prst="rect">
             <a:avLst/>
@@ -6125,12 +6259,11 @@
           <a:noFill/>
         </p:spPr>
         <p:txBody>
-          <a:bodyPr wrap="square" anchor="ctr" lIns="50800" rIns="50800">
+          <a:bodyPr wrap="square" anchor="ctr">
             <a:spAutoFit/>
           </a:bodyPr>
           <a:lstStyle/>
           <a:p>
-            <a:pPr algn="l"/>
             <a:r>
               <a:rPr sz="1400" b="0">
                 <a:solidFill>
@@ -6138,7 +6271,7 @@
                 </a:solidFill>
                 <a:latin typeface="Calibri"/>
               </a:rPr>
-              <a:t>ISO 23247 seriyasi (ishlab chiqarish uchun raqamli egizak asoslari) egizak arxitekturasini to'rt domenga bo'ladi: kuzatiladigan ishlab chiqarish elementlari, ma'lumot yig'ish va qurilma…</a:t>
+              <a:t>ISO 23247 seriyasi (ishlab chiqarish uchun raqamli egizak asoslari) egizak arxitekturasini to'rt domenga bo'ladi: kuzatiladigan ishlab chiqarish elementlari, ma'lumot yig'ish va qurilma boshqaruvi, raqamli egizak yadrosi (modellashtirish, sinxronizatsiya…</a:t>
             </a:r>
           </a:p>
         </p:txBody>
@@ -6151,12 +6284,12 @@
         </p:nvSpPr>
         <p:spPr>
           <a:xfrm>
-            <a:off x="550000" y="3328000"/>
-            <a:ext cx="11100000" cy="894000"/>
+            <a:off x="550000" y="3830000"/>
+            <a:ext cx="11100000" cy="1180000"/>
           </a:xfrm>
           <a:prstGeom prst="roundRect">
             <a:avLst>
-              <a:gd name="adj" fmla="val 18000"/>
+              <a:gd name="adj" fmla="val 8000"/>
             </a:avLst>
           </a:prstGeom>
           <a:solidFill>
@@ -6197,8 +6330,8 @@
         </p:nvSpPr>
         <p:spPr>
           <a:xfrm>
-            <a:off x="550000" y="3328000"/>
-            <a:ext cx="70000" cy="894000"/>
+            <a:off x="550000" y="3830000"/>
+            <a:ext cx="70000" cy="1180000"/>
           </a:xfrm>
           <a:prstGeom prst="rect">
             <a:avLst/>
@@ -6241,8 +6374,8 @@
         </p:nvSpPr>
         <p:spPr>
           <a:xfrm>
-            <a:off x="800000" y="3545000"/>
-            <a:ext cx="460000" cy="460000"/>
+            <a:off x="780000" y="4210000"/>
+            <a:ext cx="420000" cy="420000"/>
           </a:xfrm>
           <a:prstGeom prst="ellipse">
             <a:avLst/>
@@ -6275,7 +6408,7 @@
           <a:p>
             <a:pPr algn="ctr"/>
             <a:r>
-              <a:rPr sz="1600" b="1">
+              <a:rPr sz="1400" b="1">
                 <a:solidFill>
                   <a:srgbClr val="FFFFFF"/>
                 </a:solidFill>
@@ -6294,8 +6427,8 @@
         </p:nvSpPr>
         <p:spPr>
           <a:xfrm>
-            <a:off x="1450000" y="3328000"/>
-            <a:ext cx="10050000" cy="894000"/>
+            <a:off x="1380000" y="3870000"/>
+            <a:ext cx="10150000" cy="1100000"/>
           </a:xfrm>
           <a:prstGeom prst="rect">
             <a:avLst/>
@@ -6303,12 +6436,11 @@
           <a:noFill/>
         </p:spPr>
         <p:txBody>
-          <a:bodyPr wrap="square" anchor="ctr" lIns="50800" rIns="50800">
+          <a:bodyPr wrap="square" anchor="ctr">
             <a:spAutoFit/>
           </a:bodyPr>
           <a:lstStyle/>
           <a:p>
-            <a:pPr algn="l"/>
             <a:r>
               <a:rPr sz="1400" b="0">
                 <a:solidFill>
@@ -6329,12 +6461,12 @@
         </p:nvSpPr>
         <p:spPr>
           <a:xfrm>
-            <a:off x="550000" y="4342000"/>
-            <a:ext cx="11100000" cy="894000"/>
+            <a:off x="550000" y="5120000"/>
+            <a:ext cx="11100000" cy="1180000"/>
           </a:xfrm>
           <a:prstGeom prst="roundRect">
             <a:avLst>
-              <a:gd name="adj" fmla="val 18000"/>
+              <a:gd name="adj" fmla="val 8000"/>
             </a:avLst>
           </a:prstGeom>
           <a:solidFill>
@@ -6375,8 +6507,8 @@
         </p:nvSpPr>
         <p:spPr>
           <a:xfrm>
-            <a:off x="550000" y="4342000"/>
-            <a:ext cx="70000" cy="894000"/>
+            <a:off x="550000" y="5120000"/>
+            <a:ext cx="70000" cy="1180000"/>
           </a:xfrm>
           <a:prstGeom prst="rect">
             <a:avLst/>
@@ -6419,8 +6551,8 @@
         </p:nvSpPr>
         <p:spPr>
           <a:xfrm>
-            <a:off x="800000" y="4559000"/>
-            <a:ext cx="460000" cy="460000"/>
+            <a:off x="780000" y="5500000"/>
+            <a:ext cx="420000" cy="420000"/>
           </a:xfrm>
           <a:prstGeom prst="ellipse">
             <a:avLst/>
@@ -6453,7 +6585,7 @@
           <a:p>
             <a:pPr algn="ctr"/>
             <a:r>
-              <a:rPr sz="1600" b="1">
+              <a:rPr sz="1400" b="1">
                 <a:solidFill>
                   <a:srgbClr val="FFFFFF"/>
                 </a:solidFill>
@@ -6472,8 +6604,8 @@
         </p:nvSpPr>
         <p:spPr>
           <a:xfrm>
-            <a:off x="1450000" y="4342000"/>
-            <a:ext cx="10050000" cy="894000"/>
+            <a:off x="1380000" y="5160000"/>
+            <a:ext cx="10150000" cy="1100000"/>
           </a:xfrm>
           <a:prstGeom prst="rect">
             <a:avLst/>
@@ -6481,198 +6613,35 @@
           <a:noFill/>
         </p:spPr>
         <p:txBody>
-          <a:bodyPr wrap="square" anchor="ctr" lIns="50800" rIns="50800">
+          <a:bodyPr wrap="square" anchor="ctr">
             <a:spAutoFit/>
           </a:bodyPr>
           <a:lstStyle/>
           <a:p>
-            <a:pPr algn="l"/>
             <a:r>
-              <a:rPr sz="1400" b="0">
+              <a:rPr sz="1500" b="1">
                 <a:solidFill>
-                  <a:srgbClr val="1B2430"/>
+                  <a:srgbClr val="1F3A5F"/>
                 </a:solidFill>
                 <a:latin typeface="Calibri"/>
               </a:rPr>
-              <a:t>Tavsiflovchi (descriptive) egizak — obyektning joriy holatini 3D yoki sxema ko'rinishida real vaqtda aks ettiradi.</a:t>
+              <a:t>Tavsiflovchi (descriptive) egizak.</a:t>
             </a:r>
           </a:p>
-        </p:txBody>
-      </p:sp>
-      <p:sp>
-        <p:nvSpPr>
-          <p:cNvPr id="26" name="Rounded Rectangle 25"/>
-          <p:cNvSpPr/>
-          <p:nvPr/>
-        </p:nvSpPr>
-        <p:spPr>
-          <a:xfrm>
-            <a:off x="550000" y="5356000"/>
-            <a:ext cx="11100000" cy="894000"/>
-          </a:xfrm>
-          <a:prstGeom prst="roundRect">
-            <a:avLst>
-              <a:gd name="adj" fmla="val 18000"/>
-            </a:avLst>
-          </a:prstGeom>
-          <a:solidFill>
-            <a:srgbClr val="F5F8FC"/>
-          </a:solidFill>
-          <a:ln>
-            <a:noFill/>
-          </a:ln>
-          <a:effectLst/>
-        </p:spPr>
-        <p:style>
-          <a:lnRef idx="1">
-            <a:schemeClr val="accent1"/>
-          </a:lnRef>
-          <a:fillRef idx="3">
-            <a:schemeClr val="accent1"/>
-          </a:fillRef>
-          <a:effectRef idx="2">
-            <a:schemeClr val="accent1"/>
-          </a:effectRef>
-          <a:fontRef idx="minor">
-            <a:schemeClr val="lt1"/>
-          </a:fontRef>
-        </p:style>
-        <p:txBody>
-          <a:bodyPr rtlCol="0" anchor="ctr"/>
-          <a:lstStyle/>
-          <a:p>
-            <a:pPr algn="ctr"/>
-          </a:p>
-        </p:txBody>
-      </p:sp>
-      <p:sp>
-        <p:nvSpPr>
-          <p:cNvPr id="27" name="Rectangle 26"/>
-          <p:cNvSpPr/>
-          <p:nvPr/>
-        </p:nvSpPr>
-        <p:spPr>
-          <a:xfrm>
-            <a:off x="550000" y="5356000"/>
-            <a:ext cx="70000" cy="894000"/>
-          </a:xfrm>
-          <a:prstGeom prst="rect">
-            <a:avLst/>
-          </a:prstGeom>
-          <a:solidFill>
-            <a:srgbClr val="C0392B"/>
-          </a:solidFill>
-          <a:ln>
-            <a:noFill/>
-          </a:ln>
-          <a:effectLst/>
-        </p:spPr>
-        <p:style>
-          <a:lnRef idx="1">
-            <a:schemeClr val="accent1"/>
-          </a:lnRef>
-          <a:fillRef idx="3">
-            <a:schemeClr val="accent1"/>
-          </a:fillRef>
-          <a:effectRef idx="2">
-            <a:schemeClr val="accent1"/>
-          </a:effectRef>
-          <a:fontRef idx="minor">
-            <a:schemeClr val="lt1"/>
-          </a:fontRef>
-        </p:style>
-        <p:txBody>
-          <a:bodyPr rtlCol="0" anchor="ctr"/>
-          <a:lstStyle/>
-          <a:p>
-            <a:pPr algn="ctr"/>
-          </a:p>
-        </p:txBody>
-      </p:sp>
-      <p:sp>
-        <p:nvSpPr>
-          <p:cNvPr id="28" name="Oval 27"/>
-          <p:cNvSpPr/>
-          <p:nvPr/>
-        </p:nvSpPr>
-        <p:spPr>
-          <a:xfrm>
-            <a:off x="800000" y="5573000"/>
-            <a:ext cx="460000" cy="460000"/>
-          </a:xfrm>
-          <a:prstGeom prst="ellipse">
-            <a:avLst/>
-          </a:prstGeom>
-          <a:solidFill>
-            <a:srgbClr val="C0392B"/>
-          </a:solidFill>
-          <a:ln>
-            <a:noFill/>
-          </a:ln>
-          <a:effectLst/>
-        </p:spPr>
-        <p:style>
-          <a:lnRef idx="1">
-            <a:schemeClr val="accent1"/>
-          </a:lnRef>
-          <a:fillRef idx="3">
-            <a:schemeClr val="accent1"/>
-          </a:fillRef>
-          <a:effectRef idx="2">
-            <a:schemeClr val="accent1"/>
-          </a:effectRef>
-          <a:fontRef idx="minor">
-            <a:schemeClr val="lt1"/>
-          </a:fontRef>
-        </p:style>
-        <p:txBody>
-          <a:bodyPr rtlCol="0" anchor="ctr" lIns="0" rIns="0"/>
-          <a:lstStyle/>
-          <a:p>
-            <a:pPr algn="ctr"/>
+          <a:p>
+            <a:pPr>
+              <a:spcBef>
+                <a:spcPts val="400"/>
+              </a:spcBef>
+            </a:pPr>
             <a:r>
-              <a:rPr sz="1600" b="1">
+              <a:rPr sz="1400">
                 <a:solidFill>
-                  <a:srgbClr val="FFFFFF"/>
+                  <a:srgbClr val="334055"/>
                 </a:solidFill>
                 <a:latin typeface="Calibri"/>
               </a:rPr>
-              <a:t>5</a:t>
-            </a:r>
-          </a:p>
-        </p:txBody>
-      </p:sp>
-      <p:sp>
-        <p:nvSpPr>
-          <p:cNvPr id="29" name="TextBox 28"/>
-          <p:cNvSpPr txBox="1"/>
-          <p:nvPr/>
-        </p:nvSpPr>
-        <p:spPr>
-          <a:xfrm>
-            <a:off x="1450000" y="5356000"/>
-            <a:ext cx="10050000" cy="894000"/>
-          </a:xfrm>
-          <a:prstGeom prst="rect">
-            <a:avLst/>
-          </a:prstGeom>
-          <a:noFill/>
-        </p:spPr>
-        <p:txBody>
-          <a:bodyPr wrap="square" anchor="ctr" lIns="50800" rIns="50800">
-            <a:spAutoFit/>
-          </a:bodyPr>
-          <a:lstStyle/>
-          <a:p>
-            <a:pPr algn="l"/>
-            <a:r>
-              <a:rPr sz="1400" b="0">
-                <a:solidFill>
-                  <a:srgbClr val="1B2430"/>
-                </a:solidFill>
-                <a:latin typeface="Calibri"/>
-              </a:rPr>
-              <a:t>Diagnostik (diagnostic) egizak — me'yordan chetlanishni aniqlaydi va sababini lokalizatsiya qiladi.</a:t>
+              <a:t>obyektning joriy holatini 3D yoki sxema ko'rinishida real vaqtda aks ettiradi.</a:t>
             </a:r>
           </a:p>
         </p:txBody>
@@ -6694,7 +6663,7 @@
               <p:cTn id="2" dur="indefinite" nodeType="mainSeq">
                 <p:childTnLst>
                   <p:par>
-                    <p:cTn id="127" fill="hold">
+                    <p:cTn id="103" fill="hold">
                       <p:stCondLst>
                         <p:cond delay="indefinite"/>
                         <p:cond evt="onBegin" delay="0">
@@ -8162,366 +8131,6 @@
                                         <p:cTn id="102" dur="550" fill="hold"/>
                                         <p:tgtEl>
                                           <p:spTgt spid="25"/>
-                                        </p:tgtEl>
-                                        <p:attrNameLst>
-                                          <p:attrName>ppt_y</p:attrName>
-                                        </p:attrNameLst>
-                                      </p:cBhvr>
-                                      <p:tavLst>
-                                        <p:tav tm="0">
-                                          <p:val>
-                                            <p:strVal val="#ppt_y+.08"/>
-                                          </p:val>
-                                        </p:tav>
-                                        <p:tav tm="100000">
-                                          <p:val>
-                                            <p:strVal val="#ppt_y"/>
-                                          </p:val>
-                                        </p:tav>
-                                      </p:tavLst>
-                                    </p:anim>
-                                  </p:childTnLst>
-                                </p:cTn>
-                              </p:par>
-                            </p:childTnLst>
-                          </p:cTn>
-                        </p:par>
-                        <p:par>
-                          <p:cTn id="103" fill="hold">
-                            <p:stCondLst>
-                              <p:cond delay="1100"/>
-                            </p:stCondLst>
-                            <p:childTnLst>
-                              <p:par>
-                                <p:cTn id="104" presetID="42" presetClass="entr" presetSubtype="0" fill="hold" grpId="0" nodeType="afterEffect">
-                                  <p:stCondLst>
-                                    <p:cond delay="0"/>
-                                  </p:stCondLst>
-                                  <p:childTnLst>
-                                    <p:set>
-                                      <p:cBhvr>
-                                        <p:cTn id="105" dur="1" fill="hold">
-                                          <p:stCondLst>
-                                            <p:cond delay="0"/>
-                                          </p:stCondLst>
-                                        </p:cTn>
-                                        <p:tgtEl>
-                                          <p:spTgt spid="26"/>
-                                        </p:tgtEl>
-                                        <p:attrNameLst>
-                                          <p:attrName>style.visibility</p:attrName>
-                                        </p:attrNameLst>
-                                      </p:cBhvr>
-                                      <p:to>
-                                        <p:strVal val="visible"/>
-                                      </p:to>
-                                    </p:set>
-                                    <p:animEffect transition="in" filter="fade">
-                                      <p:cBhvr>
-                                        <p:cTn id="106" dur="550"/>
-                                        <p:tgtEl>
-                                          <p:spTgt spid="26"/>
-                                        </p:tgtEl>
-                                      </p:cBhvr>
-                                    </p:animEffect>
-                                    <p:anim calcmode="lin" valueType="num">
-                                      <p:cBhvr additive="base">
-                                        <p:cTn id="107" dur="550" fill="hold"/>
-                                        <p:tgtEl>
-                                          <p:spTgt spid="26"/>
-                                        </p:tgtEl>
-                                        <p:attrNameLst>
-                                          <p:attrName>ppt_x</p:attrName>
-                                        </p:attrNameLst>
-                                      </p:cBhvr>
-                                      <p:tavLst>
-                                        <p:tav tm="0">
-                                          <p:val>
-                                            <p:strVal val="#ppt_x"/>
-                                          </p:val>
-                                        </p:tav>
-                                        <p:tav tm="100000">
-                                          <p:val>
-                                            <p:strVal val="#ppt_x"/>
-                                          </p:val>
-                                        </p:tav>
-                                      </p:tavLst>
-                                    </p:anim>
-                                    <p:anim calcmode="lin" valueType="num">
-                                      <p:cBhvr additive="base">
-                                        <p:cTn id="108" dur="550" fill="hold"/>
-                                        <p:tgtEl>
-                                          <p:spTgt spid="26"/>
-                                        </p:tgtEl>
-                                        <p:attrNameLst>
-                                          <p:attrName>ppt_y</p:attrName>
-                                        </p:attrNameLst>
-                                      </p:cBhvr>
-                                      <p:tavLst>
-                                        <p:tav tm="0">
-                                          <p:val>
-                                            <p:strVal val="#ppt_y+.08"/>
-                                          </p:val>
-                                        </p:tav>
-                                        <p:tav tm="100000">
-                                          <p:val>
-                                            <p:strVal val="#ppt_y"/>
-                                          </p:val>
-                                        </p:tav>
-                                      </p:tavLst>
-                                    </p:anim>
-                                  </p:childTnLst>
-                                </p:cTn>
-                              </p:par>
-                            </p:childTnLst>
-                          </p:cTn>
-                        </p:par>
-                        <p:par>
-                          <p:cTn id="109" fill="hold">
-                            <p:stCondLst>
-                              <p:cond delay="1100"/>
-                            </p:stCondLst>
-                            <p:childTnLst>
-                              <p:par>
-                                <p:cTn id="110" presetID="42" presetClass="entr" presetSubtype="0" fill="hold" grpId="0" nodeType="afterEffect">
-                                  <p:stCondLst>
-                                    <p:cond delay="0"/>
-                                  </p:stCondLst>
-                                  <p:childTnLst>
-                                    <p:set>
-                                      <p:cBhvr>
-                                        <p:cTn id="111" dur="1" fill="hold">
-                                          <p:stCondLst>
-                                            <p:cond delay="0"/>
-                                          </p:stCondLst>
-                                        </p:cTn>
-                                        <p:tgtEl>
-                                          <p:spTgt spid="27"/>
-                                        </p:tgtEl>
-                                        <p:attrNameLst>
-                                          <p:attrName>style.visibility</p:attrName>
-                                        </p:attrNameLst>
-                                      </p:cBhvr>
-                                      <p:to>
-                                        <p:strVal val="visible"/>
-                                      </p:to>
-                                    </p:set>
-                                    <p:animEffect transition="in" filter="fade">
-                                      <p:cBhvr>
-                                        <p:cTn id="112" dur="550"/>
-                                        <p:tgtEl>
-                                          <p:spTgt spid="27"/>
-                                        </p:tgtEl>
-                                      </p:cBhvr>
-                                    </p:animEffect>
-                                    <p:anim calcmode="lin" valueType="num">
-                                      <p:cBhvr additive="base">
-                                        <p:cTn id="113" dur="550" fill="hold"/>
-                                        <p:tgtEl>
-                                          <p:spTgt spid="27"/>
-                                        </p:tgtEl>
-                                        <p:attrNameLst>
-                                          <p:attrName>ppt_x</p:attrName>
-                                        </p:attrNameLst>
-                                      </p:cBhvr>
-                                      <p:tavLst>
-                                        <p:tav tm="0">
-                                          <p:val>
-                                            <p:strVal val="#ppt_x"/>
-                                          </p:val>
-                                        </p:tav>
-                                        <p:tav tm="100000">
-                                          <p:val>
-                                            <p:strVal val="#ppt_x"/>
-                                          </p:val>
-                                        </p:tav>
-                                      </p:tavLst>
-                                    </p:anim>
-                                    <p:anim calcmode="lin" valueType="num">
-                                      <p:cBhvr additive="base">
-                                        <p:cTn id="114" dur="550" fill="hold"/>
-                                        <p:tgtEl>
-                                          <p:spTgt spid="27"/>
-                                        </p:tgtEl>
-                                        <p:attrNameLst>
-                                          <p:attrName>ppt_y</p:attrName>
-                                        </p:attrNameLst>
-                                      </p:cBhvr>
-                                      <p:tavLst>
-                                        <p:tav tm="0">
-                                          <p:val>
-                                            <p:strVal val="#ppt_y+.08"/>
-                                          </p:val>
-                                        </p:tav>
-                                        <p:tav tm="100000">
-                                          <p:val>
-                                            <p:strVal val="#ppt_y"/>
-                                          </p:val>
-                                        </p:tav>
-                                      </p:tavLst>
-                                    </p:anim>
-                                  </p:childTnLst>
-                                </p:cTn>
-                              </p:par>
-                            </p:childTnLst>
-                          </p:cTn>
-                        </p:par>
-                        <p:par>
-                          <p:cTn id="115" fill="hold">
-                            <p:stCondLst>
-                              <p:cond delay="1100"/>
-                            </p:stCondLst>
-                            <p:childTnLst>
-                              <p:par>
-                                <p:cTn id="116" presetID="53" presetClass="entr" presetSubtype="16" fill="hold" grpId="0" nodeType="afterEffect">
-                                  <p:stCondLst>
-                                    <p:cond delay="0"/>
-                                  </p:stCondLst>
-                                  <p:childTnLst>
-                                    <p:set>
-                                      <p:cBhvr>
-                                        <p:cTn id="117" dur="1" fill="hold">
-                                          <p:stCondLst>
-                                            <p:cond delay="0"/>
-                                          </p:stCondLst>
-                                        </p:cTn>
-                                        <p:tgtEl>
-                                          <p:spTgt spid="28"/>
-                                        </p:tgtEl>
-                                        <p:attrNameLst>
-                                          <p:attrName>style.visibility</p:attrName>
-                                        </p:attrNameLst>
-                                      </p:cBhvr>
-                                      <p:to>
-                                        <p:strVal val="visible"/>
-                                      </p:to>
-                                    </p:set>
-                                    <p:animEffect transition="in" filter="fade">
-                                      <p:cBhvr>
-                                        <p:cTn id="118" dur="550"/>
-                                        <p:tgtEl>
-                                          <p:spTgt spid="28"/>
-                                        </p:tgtEl>
-                                      </p:cBhvr>
-                                    </p:animEffect>
-                                    <p:anim calcmode="lin" valueType="num">
-                                      <p:cBhvr additive="base">
-                                        <p:cTn id="119" dur="550" fill="hold"/>
-                                        <p:tgtEl>
-                                          <p:spTgt spid="28"/>
-                                        </p:tgtEl>
-                                        <p:attrNameLst>
-                                          <p:attrName>ppt_w</p:attrName>
-                                        </p:attrNameLst>
-                                      </p:cBhvr>
-                                      <p:tavLst>
-                                        <p:tav tm="0">
-                                          <p:val>
-                                            <p:strVal val="0"/>
-                                          </p:val>
-                                        </p:tav>
-                                        <p:tav tm="100000">
-                                          <p:val>
-                                            <p:strVal val="#ppt_w"/>
-                                          </p:val>
-                                        </p:tav>
-                                      </p:tavLst>
-                                    </p:anim>
-                                    <p:anim calcmode="lin" valueType="num">
-                                      <p:cBhvr additive="base">
-                                        <p:cTn id="120" dur="550" fill="hold"/>
-                                        <p:tgtEl>
-                                          <p:spTgt spid="28"/>
-                                        </p:tgtEl>
-                                        <p:attrNameLst>
-                                          <p:attrName>ppt_h</p:attrName>
-                                        </p:attrNameLst>
-                                      </p:cBhvr>
-                                      <p:tavLst>
-                                        <p:tav tm="0">
-                                          <p:val>
-                                            <p:strVal val="0"/>
-                                          </p:val>
-                                        </p:tav>
-                                        <p:tav tm="100000">
-                                          <p:val>
-                                            <p:strVal val="#ppt_h"/>
-                                          </p:val>
-                                        </p:tav>
-                                      </p:tavLst>
-                                    </p:anim>
-                                  </p:childTnLst>
-                                </p:cTn>
-                              </p:par>
-                            </p:childTnLst>
-                          </p:cTn>
-                        </p:par>
-                        <p:par>
-                          <p:cTn id="121" fill="hold">
-                            <p:stCondLst>
-                              <p:cond delay="1100"/>
-                            </p:stCondLst>
-                            <p:childTnLst>
-                              <p:par>
-                                <p:cTn id="122" presetID="42" presetClass="entr" presetSubtype="0" fill="hold" grpId="0" nodeType="afterEffect">
-                                  <p:stCondLst>
-                                    <p:cond delay="0"/>
-                                  </p:stCondLst>
-                                  <p:childTnLst>
-                                    <p:set>
-                                      <p:cBhvr>
-                                        <p:cTn id="123" dur="1" fill="hold">
-                                          <p:stCondLst>
-                                            <p:cond delay="0"/>
-                                          </p:stCondLst>
-                                        </p:cTn>
-                                        <p:tgtEl>
-                                          <p:spTgt spid="29"/>
-                                        </p:tgtEl>
-                                        <p:attrNameLst>
-                                          <p:attrName>style.visibility</p:attrName>
-                                        </p:attrNameLst>
-                                      </p:cBhvr>
-                                      <p:to>
-                                        <p:strVal val="visible"/>
-                                      </p:to>
-                                    </p:set>
-                                    <p:animEffect transition="in" filter="fade">
-                                      <p:cBhvr>
-                                        <p:cTn id="124" dur="550"/>
-                                        <p:tgtEl>
-                                          <p:spTgt spid="29"/>
-                                        </p:tgtEl>
-                                      </p:cBhvr>
-                                    </p:animEffect>
-                                    <p:anim calcmode="lin" valueType="num">
-                                      <p:cBhvr additive="base">
-                                        <p:cTn id="125" dur="550" fill="hold"/>
-                                        <p:tgtEl>
-                                          <p:spTgt spid="29"/>
-                                        </p:tgtEl>
-                                        <p:attrNameLst>
-                                          <p:attrName>ppt_x</p:attrName>
-                                        </p:attrNameLst>
-                                      </p:cBhvr>
-                                      <p:tavLst>
-                                        <p:tav tm="0">
-                                          <p:val>
-                                            <p:strVal val="#ppt_x"/>
-                                          </p:val>
-                                        </p:tav>
-                                        <p:tav tm="100000">
-                                          <p:val>
-                                            <p:strVal val="#ppt_x"/>
-                                          </p:val>
-                                        </p:tav>
-                                      </p:tavLst>
-                                    </p:anim>
-                                    <p:anim calcmode="lin" valueType="num">
-                                      <p:cBhvr additive="base">
-                                        <p:cTn id="126" dur="550" fill="hold"/>
-                                        <p:tgtEl>
-                                          <p:spTgt spid="29"/>
                                         </p:tgtEl>
                                         <p:attrNameLst>
                                           <p:attrName>ppt_y</p:attrName>
@@ -8588,10 +8197,6 @@
       <p:bldP spid="23" grpId="0" animBg="1"/>
       <p:bldP spid="24" grpId="0" animBg="1"/>
       <p:bldP spid="25" grpId="0" animBg="1"/>
-      <p:bldP spid="26" grpId="0" animBg="1"/>
-      <p:bldP spid="27" grpId="0" animBg="1"/>
-      <p:bldP spid="28" grpId="0" animBg="1"/>
-      <p:bldP spid="29" grpId="0" animBg="1"/>
     </p:bldLst>
   </p:timing>
 </p:sld>
@@ -8812,7 +8417,7 @@
                 </a:solidFill>
                 <a:latin typeface="Calibri"/>
               </a:rPr>
-              <a:t>Raqamli egizak (Digital Twin) texnologiyalari (2)</a:t>
+              <a:t>Raqamli egizak (Digital Twin) texnologiyalari</a:t>
             </a:r>
           </a:p>
         </p:txBody>
@@ -8939,12 +8544,12 @@
         </p:nvSpPr>
         <p:spPr>
           <a:xfrm>
-            <a:off x="550000" y="1300000"/>
-            <a:ext cx="11100000" cy="1147500"/>
+            <a:off x="550000" y="1810048"/>
+            <a:ext cx="11100000" cy="899976"/>
           </a:xfrm>
           <a:prstGeom prst="roundRect">
             <a:avLst>
-              <a:gd name="adj" fmla="val 18000"/>
+              <a:gd name="adj" fmla="val 8000"/>
             </a:avLst>
           </a:prstGeom>
           <a:solidFill>
@@ -8985,8 +8590,201 @@
         </p:nvSpPr>
         <p:spPr>
           <a:xfrm>
-            <a:off x="550000" y="1300000"/>
-            <a:ext cx="70000" cy="1147500"/>
+            <a:off x="550000" y="1810048"/>
+            <a:ext cx="70000" cy="899976"/>
+          </a:xfrm>
+          <a:prstGeom prst="rect">
+            <a:avLst/>
+          </a:prstGeom>
+          <a:solidFill>
+            <a:srgbClr val="C0392B"/>
+          </a:solidFill>
+          <a:ln>
+            <a:noFill/>
+          </a:ln>
+          <a:effectLst/>
+        </p:spPr>
+        <p:style>
+          <a:lnRef idx="1">
+            <a:schemeClr val="accent1"/>
+          </a:lnRef>
+          <a:fillRef idx="3">
+            <a:schemeClr val="accent1"/>
+          </a:fillRef>
+          <a:effectRef idx="2">
+            <a:schemeClr val="accent1"/>
+          </a:effectRef>
+          <a:fontRef idx="minor">
+            <a:schemeClr val="lt1"/>
+          </a:fontRef>
+        </p:style>
+        <p:txBody>
+          <a:bodyPr rtlCol="0" anchor="ctr"/>
+          <a:lstStyle/>
+          <a:p>
+            <a:pPr algn="ctr"/>
+          </a:p>
+        </p:txBody>
+      </p:sp>
+      <p:sp>
+        <p:nvSpPr>
+          <p:cNvPr id="12" name="Oval 11"/>
+          <p:cNvSpPr/>
+          <p:nvPr/>
+        </p:nvSpPr>
+        <p:spPr>
+          <a:xfrm>
+            <a:off x="780000" y="2050036"/>
+            <a:ext cx="420000" cy="420000"/>
+          </a:xfrm>
+          <a:prstGeom prst="ellipse">
+            <a:avLst/>
+          </a:prstGeom>
+          <a:solidFill>
+            <a:srgbClr val="C0392B"/>
+          </a:solidFill>
+          <a:ln>
+            <a:noFill/>
+          </a:ln>
+          <a:effectLst/>
+        </p:spPr>
+        <p:style>
+          <a:lnRef idx="1">
+            <a:schemeClr val="accent1"/>
+          </a:lnRef>
+          <a:fillRef idx="3">
+            <a:schemeClr val="accent1"/>
+          </a:fillRef>
+          <a:effectRef idx="2">
+            <a:schemeClr val="accent1"/>
+          </a:effectRef>
+          <a:fontRef idx="minor">
+            <a:schemeClr val="lt1"/>
+          </a:fontRef>
+        </p:style>
+        <p:txBody>
+          <a:bodyPr rtlCol="0" anchor="ctr" lIns="0" rIns="0"/>
+          <a:lstStyle/>
+          <a:p>
+            <a:pPr algn="ctr"/>
+            <a:r>
+              <a:rPr sz="1400" b="1">
+                <a:solidFill>
+                  <a:srgbClr val="FFFFFF"/>
+                </a:solidFill>
+                <a:latin typeface="Calibri"/>
+              </a:rPr>
+              <a:t>5</a:t>
+            </a:r>
+          </a:p>
+        </p:txBody>
+      </p:sp>
+      <p:sp>
+        <p:nvSpPr>
+          <p:cNvPr id="13" name="TextBox 12"/>
+          <p:cNvSpPr txBox="1"/>
+          <p:nvPr/>
+        </p:nvSpPr>
+        <p:spPr>
+          <a:xfrm>
+            <a:off x="1380000" y="1850048"/>
+            <a:ext cx="10150000" cy="819976"/>
+          </a:xfrm>
+          <a:prstGeom prst="rect">
+            <a:avLst/>
+          </a:prstGeom>
+          <a:noFill/>
+        </p:spPr>
+        <p:txBody>
+          <a:bodyPr wrap="square" anchor="ctr">
+            <a:spAutoFit/>
+          </a:bodyPr>
+          <a:lstStyle/>
+          <a:p>
+            <a:r>
+              <a:rPr sz="1800" b="1">
+                <a:solidFill>
+                  <a:srgbClr val="1F3A5F"/>
+                </a:solidFill>
+                <a:latin typeface="Calibri"/>
+              </a:rPr>
+              <a:t>Diagnostik (diagnostic) egizak.</a:t>
+            </a:r>
+          </a:p>
+          <a:p>
+            <a:pPr>
+              <a:spcBef>
+                <a:spcPts val="400"/>
+              </a:spcBef>
+            </a:pPr>
+            <a:r>
+              <a:rPr sz="1700">
+                <a:solidFill>
+                  <a:srgbClr val="334055"/>
+                </a:solidFill>
+                <a:latin typeface="Calibri"/>
+              </a:rPr>
+              <a:t>me'yordan chetlanishni aniqlaydi va sababini lokalizatsiya qiladi.</a:t>
+            </a:r>
+          </a:p>
+        </p:txBody>
+      </p:sp>
+      <p:sp>
+        <p:nvSpPr>
+          <p:cNvPr id="14" name="Rounded Rectangle 13"/>
+          <p:cNvSpPr/>
+          <p:nvPr/>
+        </p:nvSpPr>
+        <p:spPr>
+          <a:xfrm>
+            <a:off x="550000" y="2820024"/>
+            <a:ext cx="11100000" cy="899976"/>
+          </a:xfrm>
+          <a:prstGeom prst="roundRect">
+            <a:avLst>
+              <a:gd name="adj" fmla="val 8000"/>
+            </a:avLst>
+          </a:prstGeom>
+          <a:solidFill>
+            <a:srgbClr val="F5F8FC"/>
+          </a:solidFill>
+          <a:ln>
+            <a:noFill/>
+          </a:ln>
+          <a:effectLst/>
+        </p:spPr>
+        <p:style>
+          <a:lnRef idx="1">
+            <a:schemeClr val="accent1"/>
+          </a:lnRef>
+          <a:fillRef idx="3">
+            <a:schemeClr val="accent1"/>
+          </a:fillRef>
+          <a:effectRef idx="2">
+            <a:schemeClr val="accent1"/>
+          </a:effectRef>
+          <a:fontRef idx="minor">
+            <a:schemeClr val="lt1"/>
+          </a:fontRef>
+        </p:style>
+        <p:txBody>
+          <a:bodyPr rtlCol="0" anchor="ctr"/>
+          <a:lstStyle/>
+          <a:p>
+            <a:pPr algn="ctr"/>
+          </a:p>
+        </p:txBody>
+      </p:sp>
+      <p:sp>
+        <p:nvSpPr>
+          <p:cNvPr id="15" name="Rectangle 14"/>
+          <p:cNvSpPr/>
+          <p:nvPr/>
+        </p:nvSpPr>
+        <p:spPr>
+          <a:xfrm>
+            <a:off x="550000" y="2820024"/>
+            <a:ext cx="70000" cy="899976"/>
           </a:xfrm>
           <a:prstGeom prst="rect">
             <a:avLst/>
@@ -9023,14 +8821,14 @@
       </p:sp>
       <p:sp>
         <p:nvSpPr>
-          <p:cNvPr id="12" name="Oval 11"/>
+          <p:cNvPr id="16" name="Oval 15"/>
           <p:cNvSpPr/>
           <p:nvPr/>
         </p:nvSpPr>
         <p:spPr>
           <a:xfrm>
-            <a:off x="800000" y="1643750"/>
-            <a:ext cx="460000" cy="460000"/>
+            <a:off x="780000" y="3060012"/>
+            <a:ext cx="420000" cy="420000"/>
           </a:xfrm>
           <a:prstGeom prst="ellipse">
             <a:avLst/>
@@ -9063,7 +8861,7 @@
           <a:p>
             <a:pPr algn="ctr"/>
             <a:r>
-              <a:rPr sz="1600" b="1">
+              <a:rPr sz="1400" b="1">
                 <a:solidFill>
                   <a:srgbClr val="FFFFFF"/>
                 </a:solidFill>
@@ -9076,14 +8874,14 @@
       </p:sp>
       <p:sp>
         <p:nvSpPr>
-          <p:cNvPr id="13" name="TextBox 12"/>
+          <p:cNvPr id="17" name="TextBox 16"/>
           <p:cNvSpPr txBox="1"/>
           <p:nvPr/>
         </p:nvSpPr>
         <p:spPr>
           <a:xfrm>
-            <a:off x="1450000" y="1300000"/>
-            <a:ext cx="10050000" cy="1147500"/>
+            <a:off x="1380000" y="2860024"/>
+            <a:ext cx="10150000" cy="819976"/>
           </a:xfrm>
           <a:prstGeom prst="rect">
             <a:avLst/>
@@ -9091,38 +8889,53 @@
           <a:noFill/>
         </p:spPr>
         <p:txBody>
-          <a:bodyPr wrap="square" anchor="ctr" lIns="50800" rIns="50800">
+          <a:bodyPr wrap="square" anchor="ctr">
             <a:spAutoFit/>
           </a:bodyPr>
           <a:lstStyle/>
           <a:p>
-            <a:pPr algn="l"/>
             <a:r>
-              <a:rPr sz="1600" b="0">
+              <a:rPr sz="1800" b="1">
                 <a:solidFill>
-                  <a:srgbClr val="1B2430"/>
+                  <a:srgbClr val="1F3A5F"/>
                 </a:solidFill>
                 <a:latin typeface="Calibri"/>
               </a:rPr>
-              <a:t>Bashoratli (predictive) egizak — qolgan foydali resurs (Remaining Useful Life, RUL) va nosozlik ehtimolini baholaydi.</a:t>
+              <a:t>Bashoratli (predictive) egizak.</a:t>
             </a:r>
           </a:p>
-        </p:txBody>
-      </p:sp>
-      <p:sp>
-        <p:nvSpPr>
-          <p:cNvPr id="14" name="Rounded Rectangle 13"/>
+          <a:p>
+            <a:pPr>
+              <a:spcBef>
+                <a:spcPts val="400"/>
+              </a:spcBef>
+            </a:pPr>
+            <a:r>
+              <a:rPr sz="1700">
+                <a:solidFill>
+                  <a:srgbClr val="334055"/>
+                </a:solidFill>
+                <a:latin typeface="Calibri"/>
+              </a:rPr>
+              <a:t>qolgan foydali resurs (Remaining Useful Life, RUL) va nosozlik ehtimolini baholaydi.</a:t>
+            </a:r>
+          </a:p>
+        </p:txBody>
+      </p:sp>
+      <p:sp>
+        <p:nvSpPr>
+          <p:cNvPr id="18" name="Rounded Rectangle 17"/>
           <p:cNvSpPr/>
           <p:nvPr/>
         </p:nvSpPr>
         <p:spPr>
           <a:xfrm>
-            <a:off x="550000" y="2567500"/>
-            <a:ext cx="11100000" cy="1147500"/>
+            <a:off x="550000" y="3830000"/>
+            <a:ext cx="11100000" cy="899976"/>
           </a:xfrm>
           <a:prstGeom prst="roundRect">
             <a:avLst>
-              <a:gd name="adj" fmla="val 18000"/>
+              <a:gd name="adj" fmla="val 8000"/>
             </a:avLst>
           </a:prstGeom>
           <a:solidFill>
@@ -9157,14 +8970,14 @@
       </p:sp>
       <p:sp>
         <p:nvSpPr>
-          <p:cNvPr id="15" name="Rectangle 14"/>
+          <p:cNvPr id="19" name="Rectangle 18"/>
           <p:cNvSpPr/>
           <p:nvPr/>
         </p:nvSpPr>
         <p:spPr>
           <a:xfrm>
-            <a:off x="550000" y="2567500"/>
-            <a:ext cx="70000" cy="1147500"/>
+            <a:off x="550000" y="3830000"/>
+            <a:ext cx="70000" cy="899976"/>
           </a:xfrm>
           <a:prstGeom prst="rect">
             <a:avLst/>
@@ -9201,14 +9014,14 @@
       </p:sp>
       <p:sp>
         <p:nvSpPr>
-          <p:cNvPr id="16" name="Oval 15"/>
+          <p:cNvPr id="20" name="Oval 19"/>
           <p:cNvSpPr/>
           <p:nvPr/>
         </p:nvSpPr>
         <p:spPr>
           <a:xfrm>
-            <a:off x="800000" y="2911250"/>
-            <a:ext cx="460000" cy="460000"/>
+            <a:off x="780000" y="4069988"/>
+            <a:ext cx="420000" cy="420000"/>
           </a:xfrm>
           <a:prstGeom prst="ellipse">
             <a:avLst/>
@@ -9241,7 +9054,7 @@
           <a:p>
             <a:pPr algn="ctr"/>
             <a:r>
-              <a:rPr sz="1600" b="1">
+              <a:rPr sz="1400" b="1">
                 <a:solidFill>
                   <a:srgbClr val="FFFFFF"/>
                 </a:solidFill>
@@ -9254,14 +9067,14 @@
       </p:sp>
       <p:sp>
         <p:nvSpPr>
-          <p:cNvPr id="17" name="TextBox 16"/>
+          <p:cNvPr id="21" name="TextBox 20"/>
           <p:cNvSpPr txBox="1"/>
           <p:nvPr/>
         </p:nvSpPr>
         <p:spPr>
           <a:xfrm>
-            <a:off x="1450000" y="2567500"/>
-            <a:ext cx="10050000" cy="1147500"/>
+            <a:off x="1380000" y="3870000"/>
+            <a:ext cx="10150000" cy="819976"/>
           </a:xfrm>
           <a:prstGeom prst="rect">
             <a:avLst/>
@@ -9269,38 +9082,53 @@
           <a:noFill/>
         </p:spPr>
         <p:txBody>
-          <a:bodyPr wrap="square" anchor="ctr" lIns="50800" rIns="50800">
+          <a:bodyPr wrap="square" anchor="ctr">
             <a:spAutoFit/>
           </a:bodyPr>
           <a:lstStyle/>
           <a:p>
-            <a:pPr algn="l"/>
             <a:r>
-              <a:rPr sz="1600" b="0">
+              <a:rPr sz="1800" b="1">
                 <a:solidFill>
-                  <a:srgbClr val="1B2430"/>
+                  <a:srgbClr val="1F3A5F"/>
                 </a:solidFill>
                 <a:latin typeface="Calibri"/>
               </a:rPr>
-              <a:t>Buyuruvchi (prescriptive) egizak — optimal harakatni taklif qiladi, odatda stsenariylar simulyatsiyasi orqali.</a:t>
+              <a:t>Buyuruvchi (prescriptive) egizak.</a:t>
             </a:r>
           </a:p>
-        </p:txBody>
-      </p:sp>
-      <p:sp>
-        <p:nvSpPr>
-          <p:cNvPr id="18" name="Rounded Rectangle 17"/>
+          <a:p>
+            <a:pPr>
+              <a:spcBef>
+                <a:spcPts val="400"/>
+              </a:spcBef>
+            </a:pPr>
+            <a:r>
+              <a:rPr sz="1700">
+                <a:solidFill>
+                  <a:srgbClr val="334055"/>
+                </a:solidFill>
+                <a:latin typeface="Calibri"/>
+              </a:rPr>
+              <a:t>optimal harakatni taklif qiladi, odatda stsenariylar simulyatsiyasi orqali.</a:t>
+            </a:r>
+          </a:p>
+        </p:txBody>
+      </p:sp>
+      <p:sp>
+        <p:nvSpPr>
+          <p:cNvPr id="22" name="Rounded Rectangle 21"/>
           <p:cNvSpPr/>
           <p:nvPr/>
         </p:nvSpPr>
         <p:spPr>
           <a:xfrm>
-            <a:off x="550000" y="3835000"/>
-            <a:ext cx="11100000" cy="1147500"/>
+            <a:off x="550000" y="4839976"/>
+            <a:ext cx="11100000" cy="899976"/>
           </a:xfrm>
           <a:prstGeom prst="roundRect">
             <a:avLst>
-              <a:gd name="adj" fmla="val 18000"/>
+              <a:gd name="adj" fmla="val 8000"/>
             </a:avLst>
           </a:prstGeom>
           <a:solidFill>
@@ -9335,14 +9163,14 @@
       </p:sp>
       <p:sp>
         <p:nvSpPr>
-          <p:cNvPr id="19" name="Rectangle 18"/>
+          <p:cNvPr id="23" name="Rectangle 22"/>
           <p:cNvSpPr/>
           <p:nvPr/>
         </p:nvSpPr>
         <p:spPr>
           <a:xfrm>
-            <a:off x="550000" y="3835000"/>
-            <a:ext cx="70000" cy="1147500"/>
+            <a:off x="550000" y="4839976"/>
+            <a:ext cx="70000" cy="899976"/>
           </a:xfrm>
           <a:prstGeom prst="rect">
             <a:avLst/>
@@ -9379,14 +9207,14 @@
       </p:sp>
       <p:sp>
         <p:nvSpPr>
-          <p:cNvPr id="20" name="Oval 19"/>
+          <p:cNvPr id="24" name="Oval 23"/>
           <p:cNvSpPr/>
           <p:nvPr/>
         </p:nvSpPr>
         <p:spPr>
           <a:xfrm>
-            <a:off x="800000" y="4178750"/>
-            <a:ext cx="460000" cy="460000"/>
+            <a:off x="780000" y="5079964"/>
+            <a:ext cx="420000" cy="420000"/>
           </a:xfrm>
           <a:prstGeom prst="ellipse">
             <a:avLst/>
@@ -9419,7 +9247,7 @@
           <a:p>
             <a:pPr algn="ctr"/>
             <a:r>
-              <a:rPr sz="1600" b="1">
+              <a:rPr sz="1400" b="1">
                 <a:solidFill>
                   <a:srgbClr val="FFFFFF"/>
                 </a:solidFill>
@@ -9432,14 +9260,14 @@
       </p:sp>
       <p:sp>
         <p:nvSpPr>
-          <p:cNvPr id="21" name="TextBox 20"/>
+          <p:cNvPr id="25" name="TextBox 24"/>
           <p:cNvSpPr txBox="1"/>
           <p:nvPr/>
         </p:nvSpPr>
         <p:spPr>
           <a:xfrm>
-            <a:off x="1450000" y="3835000"/>
-            <a:ext cx="10050000" cy="1147500"/>
+            <a:off x="1380000" y="4879976"/>
+            <a:ext cx="10150000" cy="819976"/>
           </a:xfrm>
           <a:prstGeom prst="rect">
             <a:avLst/>
@@ -9447,198 +9275,35 @@
           <a:noFill/>
         </p:spPr>
         <p:txBody>
-          <a:bodyPr wrap="square" anchor="ctr" lIns="50800" rIns="50800">
+          <a:bodyPr wrap="square" anchor="ctr">
             <a:spAutoFit/>
           </a:bodyPr>
           <a:lstStyle/>
           <a:p>
-            <a:pPr algn="l"/>
             <a:r>
-              <a:rPr sz="1600" b="0">
+              <a:rPr sz="1800" b="1">
                 <a:solidFill>
-                  <a:srgbClr val="1B2430"/>
+                  <a:srgbClr val="1F3A5F"/>
                 </a:solidFill>
                 <a:latin typeface="Calibri"/>
               </a:rPr>
-              <a:t>Avtonom (autonomous) egizak — inson ishtirokisiz fizik obyektni qayta sozlaydi.</a:t>
+              <a:t>Avtonom (autonomous) egizak.</a:t>
             </a:r>
           </a:p>
-        </p:txBody>
-      </p:sp>
-      <p:sp>
-        <p:nvSpPr>
-          <p:cNvPr id="22" name="Rounded Rectangle 21"/>
-          <p:cNvSpPr/>
-          <p:nvPr/>
-        </p:nvSpPr>
-        <p:spPr>
-          <a:xfrm>
-            <a:off x="550000" y="5102500"/>
-            <a:ext cx="11100000" cy="1147500"/>
-          </a:xfrm>
-          <a:prstGeom prst="roundRect">
-            <a:avLst>
-              <a:gd name="adj" fmla="val 18000"/>
-            </a:avLst>
-          </a:prstGeom>
-          <a:solidFill>
-            <a:srgbClr val="F5F8FC"/>
-          </a:solidFill>
-          <a:ln>
-            <a:noFill/>
-          </a:ln>
-          <a:effectLst/>
-        </p:spPr>
-        <p:style>
-          <a:lnRef idx="1">
-            <a:schemeClr val="accent1"/>
-          </a:lnRef>
-          <a:fillRef idx="3">
-            <a:schemeClr val="accent1"/>
-          </a:fillRef>
-          <a:effectRef idx="2">
-            <a:schemeClr val="accent1"/>
-          </a:effectRef>
-          <a:fontRef idx="minor">
-            <a:schemeClr val="lt1"/>
-          </a:fontRef>
-        </p:style>
-        <p:txBody>
-          <a:bodyPr rtlCol="0" anchor="ctr"/>
-          <a:lstStyle/>
-          <a:p>
-            <a:pPr algn="ctr"/>
-          </a:p>
-        </p:txBody>
-      </p:sp>
-      <p:sp>
-        <p:nvSpPr>
-          <p:cNvPr id="23" name="Rectangle 22"/>
-          <p:cNvSpPr/>
-          <p:nvPr/>
-        </p:nvSpPr>
-        <p:spPr>
-          <a:xfrm>
-            <a:off x="550000" y="5102500"/>
-            <a:ext cx="70000" cy="1147500"/>
-          </a:xfrm>
-          <a:prstGeom prst="rect">
-            <a:avLst/>
-          </a:prstGeom>
-          <a:solidFill>
-            <a:srgbClr val="6A3FB5"/>
-          </a:solidFill>
-          <a:ln>
-            <a:noFill/>
-          </a:ln>
-          <a:effectLst/>
-        </p:spPr>
-        <p:style>
-          <a:lnRef idx="1">
-            <a:schemeClr val="accent1"/>
-          </a:lnRef>
-          <a:fillRef idx="3">
-            <a:schemeClr val="accent1"/>
-          </a:fillRef>
-          <a:effectRef idx="2">
-            <a:schemeClr val="accent1"/>
-          </a:effectRef>
-          <a:fontRef idx="minor">
-            <a:schemeClr val="lt1"/>
-          </a:fontRef>
-        </p:style>
-        <p:txBody>
-          <a:bodyPr rtlCol="0" anchor="ctr"/>
-          <a:lstStyle/>
-          <a:p>
-            <a:pPr algn="ctr"/>
-          </a:p>
-        </p:txBody>
-      </p:sp>
-      <p:sp>
-        <p:nvSpPr>
-          <p:cNvPr id="24" name="Oval 23"/>
-          <p:cNvSpPr/>
-          <p:nvPr/>
-        </p:nvSpPr>
-        <p:spPr>
-          <a:xfrm>
-            <a:off x="800000" y="5446250"/>
-            <a:ext cx="460000" cy="460000"/>
-          </a:xfrm>
-          <a:prstGeom prst="ellipse">
-            <a:avLst/>
-          </a:prstGeom>
-          <a:solidFill>
-            <a:srgbClr val="6A3FB5"/>
-          </a:solidFill>
-          <a:ln>
-            <a:noFill/>
-          </a:ln>
-          <a:effectLst/>
-        </p:spPr>
-        <p:style>
-          <a:lnRef idx="1">
-            <a:schemeClr val="accent1"/>
-          </a:lnRef>
-          <a:fillRef idx="3">
-            <a:schemeClr val="accent1"/>
-          </a:fillRef>
-          <a:effectRef idx="2">
-            <a:schemeClr val="accent1"/>
-          </a:effectRef>
-          <a:fontRef idx="minor">
-            <a:schemeClr val="lt1"/>
-          </a:fontRef>
-        </p:style>
-        <p:txBody>
-          <a:bodyPr rtlCol="0" anchor="ctr" lIns="0" rIns="0"/>
-          <a:lstStyle/>
-          <a:p>
-            <a:pPr algn="ctr"/>
+          <a:p>
+            <a:pPr>
+              <a:spcBef>
+                <a:spcPts val="400"/>
+              </a:spcBef>
+            </a:pPr>
             <a:r>
-              <a:rPr sz="1600" b="1">
+              <a:rPr sz="1700">
                 <a:solidFill>
-                  <a:srgbClr val="FFFFFF"/>
+                  <a:srgbClr val="334055"/>
                 </a:solidFill>
                 <a:latin typeface="Calibri"/>
               </a:rPr>
-              <a:t>9</a:t>
-            </a:r>
-          </a:p>
-        </p:txBody>
-      </p:sp>
-      <p:sp>
-        <p:nvSpPr>
-          <p:cNvPr id="25" name="TextBox 24"/>
-          <p:cNvSpPr txBox="1"/>
-          <p:nvPr/>
-        </p:nvSpPr>
-        <p:spPr>
-          <a:xfrm>
-            <a:off x="1450000" y="5102500"/>
-            <a:ext cx="10050000" cy="1147500"/>
-          </a:xfrm>
-          <a:prstGeom prst="rect">
-            <a:avLst/>
-          </a:prstGeom>
-          <a:noFill/>
-        </p:spPr>
-        <p:txBody>
-          <a:bodyPr wrap="square" anchor="ctr" lIns="50800" rIns="50800">
-            <a:spAutoFit/>
-          </a:bodyPr>
-          <a:lstStyle/>
-          <a:p>
-            <a:pPr algn="l"/>
-            <a:r>
-              <a:rPr sz="1600" b="0">
-                <a:solidFill>
-                  <a:srgbClr val="1B2430"/>
-                </a:solidFill>
-                <a:latin typeface="Calibri"/>
-              </a:rPr>
-              <a:t>Model turi nuqtai nazaridan uchta yondashuv bor.</a:t>
+              <a:t>inson ishtirokisiz fizik obyektni qayta sozlaydi.</a:t>
             </a:r>
           </a:p>
         </p:txBody>
@@ -11218,6 +10883,997 @@
         <p:spPr>
           <a:xfrm>
             <a:off x="0" y="0"/>
+            <a:ext cx="12192000" cy="1000000"/>
+          </a:xfrm>
+          <a:prstGeom prst="rect">
+            <a:avLst/>
+          </a:prstGeom>
+          <a:gradFill rotWithShape="1">
+            <a:gsLst>
+              <a:gs pos="0">
+                <a:srgbClr val="1F3A5F"/>
+              </a:gs>
+              <a:gs pos="100000">
+                <a:srgbClr val="2D5C8F"/>
+              </a:gs>
+            </a:gsLst>
+            <a:lin scaled="0" ang="0"/>
+          </a:gradFill>
+          <a:ln>
+            <a:noFill/>
+          </a:ln>
+          <a:effectLst/>
+        </p:spPr>
+        <p:style>
+          <a:lnRef idx="1">
+            <a:schemeClr val="accent1"/>
+          </a:lnRef>
+          <a:fillRef idx="3">
+            <a:schemeClr val="accent1"/>
+          </a:fillRef>
+          <a:effectRef idx="2">
+            <a:schemeClr val="accent1"/>
+          </a:effectRef>
+          <a:fontRef idx="minor">
+            <a:schemeClr val="lt1"/>
+          </a:fontRef>
+        </p:style>
+        <p:txBody>
+          <a:bodyPr rtlCol="0" anchor="ctr"/>
+          <a:lstStyle/>
+          <a:p>
+            <a:pPr algn="ctr"/>
+          </a:p>
+        </p:txBody>
+      </p:sp>
+      <p:sp>
+        <p:nvSpPr>
+          <p:cNvPr id="3" name="Oval 2"/>
+          <p:cNvSpPr/>
+          <p:nvPr/>
+        </p:nvSpPr>
+        <p:spPr>
+          <a:xfrm>
+            <a:off x="11050000" y="-350000"/>
+            <a:ext cx="900000" cy="900000"/>
+          </a:xfrm>
+          <a:prstGeom prst="ellipse">
+            <a:avLst/>
+          </a:prstGeom>
+          <a:solidFill>
+            <a:srgbClr val="3B6EA5"/>
+          </a:solidFill>
+          <a:ln>
+            <a:noFill/>
+          </a:ln>
+          <a:effectLst/>
+        </p:spPr>
+        <p:style>
+          <a:lnRef idx="1">
+            <a:schemeClr val="accent1"/>
+          </a:lnRef>
+          <a:fillRef idx="3">
+            <a:schemeClr val="accent1"/>
+          </a:fillRef>
+          <a:effectRef idx="2">
+            <a:schemeClr val="accent1"/>
+          </a:effectRef>
+          <a:fontRef idx="minor">
+            <a:schemeClr val="lt1"/>
+          </a:fontRef>
+        </p:style>
+        <p:txBody>
+          <a:bodyPr rtlCol="0" anchor="ctr"/>
+          <a:lstStyle/>
+          <a:p>
+            <a:pPr algn="ctr"/>
+          </a:p>
+        </p:txBody>
+      </p:sp>
+      <p:sp>
+        <p:nvSpPr>
+          <p:cNvPr id="4" name="Oval 3"/>
+          <p:cNvSpPr/>
+          <p:nvPr/>
+        </p:nvSpPr>
+        <p:spPr>
+          <a:xfrm>
+            <a:off x="11550000" y="450000"/>
+            <a:ext cx="420000" cy="420000"/>
+          </a:xfrm>
+          <a:prstGeom prst="ellipse">
+            <a:avLst/>
+          </a:prstGeom>
+          <a:solidFill>
+            <a:srgbClr val="0F8B8D"/>
+          </a:solidFill>
+          <a:ln>
+            <a:noFill/>
+          </a:ln>
+          <a:effectLst/>
+        </p:spPr>
+        <p:style>
+          <a:lnRef idx="1">
+            <a:schemeClr val="accent1"/>
+          </a:lnRef>
+          <a:fillRef idx="3">
+            <a:schemeClr val="accent1"/>
+          </a:fillRef>
+          <a:effectRef idx="2">
+            <a:schemeClr val="accent1"/>
+          </a:effectRef>
+          <a:fontRef idx="minor">
+            <a:schemeClr val="lt1"/>
+          </a:fontRef>
+        </p:style>
+        <p:txBody>
+          <a:bodyPr rtlCol="0" anchor="ctr"/>
+          <a:lstStyle/>
+          <a:p>
+            <a:pPr algn="ctr"/>
+          </a:p>
+        </p:txBody>
+      </p:sp>
+      <p:sp>
+        <p:nvSpPr>
+          <p:cNvPr id="5" name="TextBox 4"/>
+          <p:cNvSpPr txBox="1"/>
+          <p:nvPr/>
+        </p:nvSpPr>
+        <p:spPr>
+          <a:xfrm>
+            <a:off x="500000" y="110000"/>
+            <a:ext cx="10300000" cy="300000"/>
+          </a:xfrm>
+          <a:prstGeom prst="rect">
+            <a:avLst/>
+          </a:prstGeom>
+          <a:noFill/>
+        </p:spPr>
+        <p:txBody>
+          <a:bodyPr wrap="square" anchor="t" lIns="50800" rIns="50800">
+            <a:spAutoFit/>
+          </a:bodyPr>
+          <a:lstStyle/>
+          <a:p>
+            <a:pPr algn="l"/>
+            <a:r>
+              <a:rPr sz="1200" b="1">
+                <a:solidFill>
+                  <a:srgbClr val="A9C4E6"/>
+                </a:solidFill>
+                <a:latin typeface="Calibri"/>
+              </a:rPr>
+              <a:t>3-REJA</a:t>
+            </a:r>
+          </a:p>
+        </p:txBody>
+      </p:sp>
+      <p:sp>
+        <p:nvSpPr>
+          <p:cNvPr id="6" name="TextBox 5"/>
+          <p:cNvSpPr txBox="1"/>
+          <p:nvPr/>
+        </p:nvSpPr>
+        <p:spPr>
+          <a:xfrm>
+            <a:off x="500000" y="330000"/>
+            <a:ext cx="10400000" cy="650000"/>
+          </a:xfrm>
+          <a:prstGeom prst="rect">
+            <a:avLst/>
+          </a:prstGeom>
+          <a:noFill/>
+        </p:spPr>
+        <p:txBody>
+          <a:bodyPr wrap="square" anchor="ctr" lIns="50800" rIns="50800">
+            <a:spAutoFit/>
+          </a:bodyPr>
+          <a:lstStyle/>
+          <a:p>
+            <a:pPr algn="l"/>
+            <a:r>
+              <a:rPr sz="2600" b="1">
+                <a:solidFill>
+                  <a:srgbClr val="FFFFFF"/>
+                </a:solidFill>
+                <a:latin typeface="Calibri"/>
+              </a:rPr>
+              <a:t>Raqamli egizak (Digital Twin) texnologiyalari</a:t>
+            </a:r>
+          </a:p>
+        </p:txBody>
+      </p:sp>
+      <p:sp>
+        <p:nvSpPr>
+          <p:cNvPr id="7" name="Rectangle 6"/>
+          <p:cNvSpPr/>
+          <p:nvPr/>
+        </p:nvSpPr>
+        <p:spPr>
+          <a:xfrm>
+            <a:off x="0" y="1000000"/>
+            <a:ext cx="12192000" cy="45000"/>
+          </a:xfrm>
+          <a:prstGeom prst="rect">
+            <a:avLst/>
+          </a:prstGeom>
+          <a:solidFill>
+            <a:srgbClr val="0F8B8D"/>
+          </a:solidFill>
+          <a:ln>
+            <a:noFill/>
+          </a:ln>
+          <a:effectLst/>
+        </p:spPr>
+        <p:style>
+          <a:lnRef idx="1">
+            <a:schemeClr val="accent1"/>
+          </a:lnRef>
+          <a:fillRef idx="3">
+            <a:schemeClr val="accent1"/>
+          </a:fillRef>
+          <a:effectRef idx="2">
+            <a:schemeClr val="accent1"/>
+          </a:effectRef>
+          <a:fontRef idx="minor">
+            <a:schemeClr val="lt1"/>
+          </a:fontRef>
+        </p:style>
+        <p:txBody>
+          <a:bodyPr rtlCol="0" anchor="ctr"/>
+          <a:lstStyle/>
+          <a:p>
+            <a:pPr algn="ctr"/>
+          </a:p>
+        </p:txBody>
+      </p:sp>
+      <p:sp>
+        <p:nvSpPr>
+          <p:cNvPr id="8" name="TextBox 7"/>
+          <p:cNvSpPr txBox="1"/>
+          <p:nvPr/>
+        </p:nvSpPr>
+        <p:spPr>
+          <a:xfrm>
+            <a:off x="500000" y="6420000"/>
+            <a:ext cx="9500000" cy="300000"/>
+          </a:xfrm>
+          <a:prstGeom prst="rect">
+            <a:avLst/>
+          </a:prstGeom>
+          <a:noFill/>
+        </p:spPr>
+        <p:txBody>
+          <a:bodyPr wrap="square" anchor="t" lIns="50800" rIns="50800">
+            <a:spAutoFit/>
+          </a:bodyPr>
+          <a:lstStyle/>
+          <a:p>
+            <a:pPr algn="l"/>
+            <a:r>
+              <a:rPr sz="1000" b="0">
+                <a:solidFill>
+                  <a:srgbClr val="5B6878"/>
+                </a:solidFill>
+                <a:latin typeface="Calibri"/>
+              </a:rPr>
+              <a:t>M13 · Intellektual kompyuter tizimlarini loyihalash</a:t>
+            </a:r>
+          </a:p>
+        </p:txBody>
+      </p:sp>
+      <p:sp>
+        <p:nvSpPr>
+          <p:cNvPr id="9" name="TextBox 8"/>
+          <p:cNvSpPr txBox="1"/>
+          <p:nvPr/>
+        </p:nvSpPr>
+        <p:spPr>
+          <a:xfrm>
+            <a:off x="10600000" y="6420000"/>
+            <a:ext cx="1100000" cy="300000"/>
+          </a:xfrm>
+          <a:prstGeom prst="rect">
+            <a:avLst/>
+          </a:prstGeom>
+          <a:noFill/>
+        </p:spPr>
+        <p:txBody>
+          <a:bodyPr wrap="square" anchor="t" lIns="50800" rIns="50800">
+            <a:spAutoFit/>
+          </a:bodyPr>
+          <a:lstStyle/>
+          <a:p>
+            <a:pPr algn="r"/>
+            <a:r>
+              <a:rPr sz="1000" b="0">
+                <a:solidFill>
+                  <a:srgbClr val="5B6878"/>
+                </a:solidFill>
+                <a:latin typeface="Calibri"/>
+              </a:rPr>
+              <a:t>12</a:t>
+            </a:r>
+          </a:p>
+        </p:txBody>
+      </p:sp>
+      <p:sp>
+        <p:nvSpPr>
+          <p:cNvPr id="10" name="Rounded Rectangle 9"/>
+          <p:cNvSpPr/>
+          <p:nvPr/>
+        </p:nvSpPr>
+        <p:spPr>
+          <a:xfrm>
+            <a:off x="550000" y="2897530"/>
+            <a:ext cx="11100000" cy="1754940"/>
+          </a:xfrm>
+          <a:prstGeom prst="roundRect">
+            <a:avLst>
+              <a:gd name="adj" fmla="val 8000"/>
+            </a:avLst>
+          </a:prstGeom>
+          <a:solidFill>
+            <a:srgbClr val="F5F8FC"/>
+          </a:solidFill>
+          <a:ln>
+            <a:noFill/>
+          </a:ln>
+          <a:effectLst/>
+        </p:spPr>
+        <p:style>
+          <a:lnRef idx="1">
+            <a:schemeClr val="accent1"/>
+          </a:lnRef>
+          <a:fillRef idx="3">
+            <a:schemeClr val="accent1"/>
+          </a:fillRef>
+          <a:effectRef idx="2">
+            <a:schemeClr val="accent1"/>
+          </a:effectRef>
+          <a:fontRef idx="minor">
+            <a:schemeClr val="lt1"/>
+          </a:fontRef>
+        </p:style>
+        <p:txBody>
+          <a:bodyPr rtlCol="0" anchor="ctr"/>
+          <a:lstStyle/>
+          <a:p>
+            <a:pPr algn="ctr"/>
+          </a:p>
+        </p:txBody>
+      </p:sp>
+      <p:sp>
+        <p:nvSpPr>
+          <p:cNvPr id="11" name="Rectangle 10"/>
+          <p:cNvSpPr/>
+          <p:nvPr/>
+        </p:nvSpPr>
+        <p:spPr>
+          <a:xfrm>
+            <a:off x="550000" y="2897530"/>
+            <a:ext cx="70000" cy="1754940"/>
+          </a:xfrm>
+          <a:prstGeom prst="rect">
+            <a:avLst/>
+          </a:prstGeom>
+          <a:solidFill>
+            <a:srgbClr val="6A3FB5"/>
+          </a:solidFill>
+          <a:ln>
+            <a:noFill/>
+          </a:ln>
+          <a:effectLst/>
+        </p:spPr>
+        <p:style>
+          <a:lnRef idx="1">
+            <a:schemeClr val="accent1"/>
+          </a:lnRef>
+          <a:fillRef idx="3">
+            <a:schemeClr val="accent1"/>
+          </a:fillRef>
+          <a:effectRef idx="2">
+            <a:schemeClr val="accent1"/>
+          </a:effectRef>
+          <a:fontRef idx="minor">
+            <a:schemeClr val="lt1"/>
+          </a:fontRef>
+        </p:style>
+        <p:txBody>
+          <a:bodyPr rtlCol="0" anchor="ctr"/>
+          <a:lstStyle/>
+          <a:p>
+            <a:pPr algn="ctr"/>
+          </a:p>
+        </p:txBody>
+      </p:sp>
+      <p:sp>
+        <p:nvSpPr>
+          <p:cNvPr id="12" name="Oval 11"/>
+          <p:cNvSpPr/>
+          <p:nvPr/>
+        </p:nvSpPr>
+        <p:spPr>
+          <a:xfrm>
+            <a:off x="780000" y="3565000"/>
+            <a:ext cx="420000" cy="420000"/>
+          </a:xfrm>
+          <a:prstGeom prst="ellipse">
+            <a:avLst/>
+          </a:prstGeom>
+          <a:solidFill>
+            <a:srgbClr val="6A3FB5"/>
+          </a:solidFill>
+          <a:ln>
+            <a:noFill/>
+          </a:ln>
+          <a:effectLst/>
+        </p:spPr>
+        <p:style>
+          <a:lnRef idx="1">
+            <a:schemeClr val="accent1"/>
+          </a:lnRef>
+          <a:fillRef idx="3">
+            <a:schemeClr val="accent1"/>
+          </a:fillRef>
+          <a:effectRef idx="2">
+            <a:schemeClr val="accent1"/>
+          </a:effectRef>
+          <a:fontRef idx="minor">
+            <a:schemeClr val="lt1"/>
+          </a:fontRef>
+        </p:style>
+        <p:txBody>
+          <a:bodyPr rtlCol="0" anchor="ctr" lIns="0" rIns="0"/>
+          <a:lstStyle/>
+          <a:p>
+            <a:pPr algn="ctr"/>
+            <a:r>
+              <a:rPr sz="1400" b="1">
+                <a:solidFill>
+                  <a:srgbClr val="FFFFFF"/>
+                </a:solidFill>
+                <a:latin typeface="Calibri"/>
+              </a:rPr>
+              <a:t>9</a:t>
+            </a:r>
+          </a:p>
+        </p:txBody>
+      </p:sp>
+      <p:sp>
+        <p:nvSpPr>
+          <p:cNvPr id="13" name="TextBox 12"/>
+          <p:cNvSpPr txBox="1"/>
+          <p:nvPr/>
+        </p:nvSpPr>
+        <p:spPr>
+          <a:xfrm>
+            <a:off x="1380000" y="2937530"/>
+            <a:ext cx="10150000" cy="1674940"/>
+          </a:xfrm>
+          <a:prstGeom prst="rect">
+            <a:avLst/>
+          </a:prstGeom>
+          <a:noFill/>
+        </p:spPr>
+        <p:txBody>
+          <a:bodyPr wrap="square" anchor="ctr">
+            <a:spAutoFit/>
+          </a:bodyPr>
+          <a:lstStyle/>
+          <a:p>
+            <a:r>
+              <a:rPr sz="1800" b="1">
+                <a:solidFill>
+                  <a:srgbClr val="1F3A5F"/>
+                </a:solidFill>
+                <a:latin typeface="Calibri"/>
+              </a:rPr>
+              <a:t>Model turi nuqtai nazaridan uchta yondashuv bor.</a:t>
+            </a:r>
+          </a:p>
+          <a:p>
+            <a:pPr>
+              <a:spcBef>
+                <a:spcPts val="400"/>
+              </a:spcBef>
+            </a:pPr>
+            <a:r>
+              <a:rPr sz="1700">
+                <a:solidFill>
+                  <a:srgbClr val="334055"/>
+                </a:solidFill>
+                <a:latin typeface="Calibri"/>
+              </a:rPr>
+              <a:t>Fizikaga asoslangan egizak (physics-based) differensial tenglamalar yoki muhandislik formulalariga tayanadi — masalan, nasos uchun o'xshashlik qonunlari: sarf aylanish tezligiga chiziqli (Q ~ n), bosim kvadratik (H ~ n^2), quvvat kubik (P ~ n^3) bog'liq. Ma'lumotga asoslangan egizak (data-driven) tarixiy sensor ma'lumotlaridan o'rganadi.</a:t>
+            </a:r>
+          </a:p>
+        </p:txBody>
+      </p:sp>
+    </p:spTree>
+  </p:cSld>
+  <p:clrMapOvr>
+    <a:masterClrMapping/>
+  </p:clrMapOvr>
+  <p:transition spd="med">
+    <p:fade/>
+  </p:transition>
+  <p:timing>
+    <p:tnLst>
+      <p:par>
+        <p:cTn id="1" dur="indefinite" restart="never" nodeType="tmRoot">
+          <p:childTnLst>
+            <p:seq concurrent="1" nextAc="seek">
+              <p:cTn id="2" dur="indefinite" nodeType="mainSeq">
+                <p:childTnLst>
+                  <p:par>
+                    <p:cTn id="31" fill="hold">
+                      <p:stCondLst>
+                        <p:cond delay="indefinite"/>
+                        <p:cond evt="onBegin" delay="0">
+                          <p:tn val="2"/>
+                        </p:cond>
+                      </p:stCondLst>
+                      <p:childTnLst>
+                        <p:par>
+                          <p:cTn id="3" fill="hold">
+                            <p:stCondLst>
+                              <p:cond delay="0"/>
+                            </p:stCondLst>
+                            <p:childTnLst>
+                              <p:par>
+                                <p:cTn id="4" presetID="10" presetClass="entr" presetSubtype="0" fill="hold" grpId="0" nodeType="withEffect">
+                                  <p:stCondLst>
+                                    <p:cond delay="0"/>
+                                  </p:stCondLst>
+                                  <p:childTnLst>
+                                    <p:set>
+                                      <p:cBhvr>
+                                        <p:cTn id="5" dur="1" fill="hold">
+                                          <p:stCondLst>
+                                            <p:cond delay="0"/>
+                                          </p:stCondLst>
+                                        </p:cTn>
+                                        <p:tgtEl>
+                                          <p:spTgt spid="6"/>
+                                        </p:tgtEl>
+                                        <p:attrNameLst>
+                                          <p:attrName>style.visibility</p:attrName>
+                                        </p:attrNameLst>
+                                      </p:cBhvr>
+                                      <p:to>
+                                        <p:strVal val="visible"/>
+                                      </p:to>
+                                    </p:set>
+                                    <p:animEffect transition="in" filter="fade">
+                                      <p:cBhvr>
+                                        <p:cTn id="6" dur="550"/>
+                                        <p:tgtEl>
+                                          <p:spTgt spid="6"/>
+                                        </p:tgtEl>
+                                      </p:cBhvr>
+                                    </p:animEffect>
+                                  </p:childTnLst>
+                                </p:cTn>
+                              </p:par>
+                            </p:childTnLst>
+                          </p:cTn>
+                        </p:par>
+                        <p:par>
+                          <p:cTn id="7" fill="hold">
+                            <p:stCondLst>
+                              <p:cond delay="220"/>
+                            </p:stCondLst>
+                            <p:childTnLst>
+                              <p:par>
+                                <p:cTn id="8" presetID="42" presetClass="entr" presetSubtype="0" fill="hold" grpId="0" nodeType="afterEffect">
+                                  <p:stCondLst>
+                                    <p:cond delay="0"/>
+                                  </p:stCondLst>
+                                  <p:childTnLst>
+                                    <p:set>
+                                      <p:cBhvr>
+                                        <p:cTn id="9" dur="1" fill="hold">
+                                          <p:stCondLst>
+                                            <p:cond delay="0"/>
+                                          </p:stCondLst>
+                                        </p:cTn>
+                                        <p:tgtEl>
+                                          <p:spTgt spid="10"/>
+                                        </p:tgtEl>
+                                        <p:attrNameLst>
+                                          <p:attrName>style.visibility</p:attrName>
+                                        </p:attrNameLst>
+                                      </p:cBhvr>
+                                      <p:to>
+                                        <p:strVal val="visible"/>
+                                      </p:to>
+                                    </p:set>
+                                    <p:animEffect transition="in" filter="fade">
+                                      <p:cBhvr>
+                                        <p:cTn id="10" dur="550"/>
+                                        <p:tgtEl>
+                                          <p:spTgt spid="10"/>
+                                        </p:tgtEl>
+                                      </p:cBhvr>
+                                    </p:animEffect>
+                                    <p:anim calcmode="lin" valueType="num">
+                                      <p:cBhvr additive="base">
+                                        <p:cTn id="11" dur="550" fill="hold"/>
+                                        <p:tgtEl>
+                                          <p:spTgt spid="10"/>
+                                        </p:tgtEl>
+                                        <p:attrNameLst>
+                                          <p:attrName>ppt_x</p:attrName>
+                                        </p:attrNameLst>
+                                      </p:cBhvr>
+                                      <p:tavLst>
+                                        <p:tav tm="0">
+                                          <p:val>
+                                            <p:strVal val="#ppt_x"/>
+                                          </p:val>
+                                        </p:tav>
+                                        <p:tav tm="100000">
+                                          <p:val>
+                                            <p:strVal val="#ppt_x"/>
+                                          </p:val>
+                                        </p:tav>
+                                      </p:tavLst>
+                                    </p:anim>
+                                    <p:anim calcmode="lin" valueType="num">
+                                      <p:cBhvr additive="base">
+                                        <p:cTn id="12" dur="550" fill="hold"/>
+                                        <p:tgtEl>
+                                          <p:spTgt spid="10"/>
+                                        </p:tgtEl>
+                                        <p:attrNameLst>
+                                          <p:attrName>ppt_y</p:attrName>
+                                        </p:attrNameLst>
+                                      </p:cBhvr>
+                                      <p:tavLst>
+                                        <p:tav tm="0">
+                                          <p:val>
+                                            <p:strVal val="#ppt_y+.08"/>
+                                          </p:val>
+                                        </p:tav>
+                                        <p:tav tm="100000">
+                                          <p:val>
+                                            <p:strVal val="#ppt_y"/>
+                                          </p:val>
+                                        </p:tav>
+                                      </p:tavLst>
+                                    </p:anim>
+                                  </p:childTnLst>
+                                </p:cTn>
+                              </p:par>
+                            </p:childTnLst>
+                          </p:cTn>
+                        </p:par>
+                        <p:par>
+                          <p:cTn id="13" fill="hold">
+                            <p:stCondLst>
+                              <p:cond delay="220"/>
+                            </p:stCondLst>
+                            <p:childTnLst>
+                              <p:par>
+                                <p:cTn id="14" presetID="42" presetClass="entr" presetSubtype="0" fill="hold" grpId="0" nodeType="afterEffect">
+                                  <p:stCondLst>
+                                    <p:cond delay="0"/>
+                                  </p:stCondLst>
+                                  <p:childTnLst>
+                                    <p:set>
+                                      <p:cBhvr>
+                                        <p:cTn id="15" dur="1" fill="hold">
+                                          <p:stCondLst>
+                                            <p:cond delay="0"/>
+                                          </p:stCondLst>
+                                        </p:cTn>
+                                        <p:tgtEl>
+                                          <p:spTgt spid="11"/>
+                                        </p:tgtEl>
+                                        <p:attrNameLst>
+                                          <p:attrName>style.visibility</p:attrName>
+                                        </p:attrNameLst>
+                                      </p:cBhvr>
+                                      <p:to>
+                                        <p:strVal val="visible"/>
+                                      </p:to>
+                                    </p:set>
+                                    <p:animEffect transition="in" filter="fade">
+                                      <p:cBhvr>
+                                        <p:cTn id="16" dur="550"/>
+                                        <p:tgtEl>
+                                          <p:spTgt spid="11"/>
+                                        </p:tgtEl>
+                                      </p:cBhvr>
+                                    </p:animEffect>
+                                    <p:anim calcmode="lin" valueType="num">
+                                      <p:cBhvr additive="base">
+                                        <p:cTn id="17" dur="550" fill="hold"/>
+                                        <p:tgtEl>
+                                          <p:spTgt spid="11"/>
+                                        </p:tgtEl>
+                                        <p:attrNameLst>
+                                          <p:attrName>ppt_x</p:attrName>
+                                        </p:attrNameLst>
+                                      </p:cBhvr>
+                                      <p:tavLst>
+                                        <p:tav tm="0">
+                                          <p:val>
+                                            <p:strVal val="#ppt_x"/>
+                                          </p:val>
+                                        </p:tav>
+                                        <p:tav tm="100000">
+                                          <p:val>
+                                            <p:strVal val="#ppt_x"/>
+                                          </p:val>
+                                        </p:tav>
+                                      </p:tavLst>
+                                    </p:anim>
+                                    <p:anim calcmode="lin" valueType="num">
+                                      <p:cBhvr additive="base">
+                                        <p:cTn id="18" dur="550" fill="hold"/>
+                                        <p:tgtEl>
+                                          <p:spTgt spid="11"/>
+                                        </p:tgtEl>
+                                        <p:attrNameLst>
+                                          <p:attrName>ppt_y</p:attrName>
+                                        </p:attrNameLst>
+                                      </p:cBhvr>
+                                      <p:tavLst>
+                                        <p:tav tm="0">
+                                          <p:val>
+                                            <p:strVal val="#ppt_y+.08"/>
+                                          </p:val>
+                                        </p:tav>
+                                        <p:tav tm="100000">
+                                          <p:val>
+                                            <p:strVal val="#ppt_y"/>
+                                          </p:val>
+                                        </p:tav>
+                                      </p:tavLst>
+                                    </p:anim>
+                                  </p:childTnLst>
+                                </p:cTn>
+                              </p:par>
+                            </p:childTnLst>
+                          </p:cTn>
+                        </p:par>
+                        <p:par>
+                          <p:cTn id="19" fill="hold">
+                            <p:stCondLst>
+                              <p:cond delay="220"/>
+                            </p:stCondLst>
+                            <p:childTnLst>
+                              <p:par>
+                                <p:cTn id="20" presetID="53" presetClass="entr" presetSubtype="16" fill="hold" grpId="0" nodeType="afterEffect">
+                                  <p:stCondLst>
+                                    <p:cond delay="0"/>
+                                  </p:stCondLst>
+                                  <p:childTnLst>
+                                    <p:set>
+                                      <p:cBhvr>
+                                        <p:cTn id="21" dur="1" fill="hold">
+                                          <p:stCondLst>
+                                            <p:cond delay="0"/>
+                                          </p:stCondLst>
+                                        </p:cTn>
+                                        <p:tgtEl>
+                                          <p:spTgt spid="12"/>
+                                        </p:tgtEl>
+                                        <p:attrNameLst>
+                                          <p:attrName>style.visibility</p:attrName>
+                                        </p:attrNameLst>
+                                      </p:cBhvr>
+                                      <p:to>
+                                        <p:strVal val="visible"/>
+                                      </p:to>
+                                    </p:set>
+                                    <p:animEffect transition="in" filter="fade">
+                                      <p:cBhvr>
+                                        <p:cTn id="22" dur="550"/>
+                                        <p:tgtEl>
+                                          <p:spTgt spid="12"/>
+                                        </p:tgtEl>
+                                      </p:cBhvr>
+                                    </p:animEffect>
+                                    <p:anim calcmode="lin" valueType="num">
+                                      <p:cBhvr additive="base">
+                                        <p:cTn id="23" dur="550" fill="hold"/>
+                                        <p:tgtEl>
+                                          <p:spTgt spid="12"/>
+                                        </p:tgtEl>
+                                        <p:attrNameLst>
+                                          <p:attrName>ppt_w</p:attrName>
+                                        </p:attrNameLst>
+                                      </p:cBhvr>
+                                      <p:tavLst>
+                                        <p:tav tm="0">
+                                          <p:val>
+                                            <p:strVal val="0"/>
+                                          </p:val>
+                                        </p:tav>
+                                        <p:tav tm="100000">
+                                          <p:val>
+                                            <p:strVal val="#ppt_w"/>
+                                          </p:val>
+                                        </p:tav>
+                                      </p:tavLst>
+                                    </p:anim>
+                                    <p:anim calcmode="lin" valueType="num">
+                                      <p:cBhvr additive="base">
+                                        <p:cTn id="24" dur="550" fill="hold"/>
+                                        <p:tgtEl>
+                                          <p:spTgt spid="12"/>
+                                        </p:tgtEl>
+                                        <p:attrNameLst>
+                                          <p:attrName>ppt_h</p:attrName>
+                                        </p:attrNameLst>
+                                      </p:cBhvr>
+                                      <p:tavLst>
+                                        <p:tav tm="0">
+                                          <p:val>
+                                            <p:strVal val="0"/>
+                                          </p:val>
+                                        </p:tav>
+                                        <p:tav tm="100000">
+                                          <p:val>
+                                            <p:strVal val="#ppt_h"/>
+                                          </p:val>
+                                        </p:tav>
+                                      </p:tavLst>
+                                    </p:anim>
+                                  </p:childTnLst>
+                                </p:cTn>
+                              </p:par>
+                            </p:childTnLst>
+                          </p:cTn>
+                        </p:par>
+                        <p:par>
+                          <p:cTn id="25" fill="hold">
+                            <p:stCondLst>
+                              <p:cond delay="220"/>
+                            </p:stCondLst>
+                            <p:childTnLst>
+                              <p:par>
+                                <p:cTn id="26" presetID="42" presetClass="entr" presetSubtype="0" fill="hold" grpId="0" nodeType="afterEffect">
+                                  <p:stCondLst>
+                                    <p:cond delay="0"/>
+                                  </p:stCondLst>
+                                  <p:childTnLst>
+                                    <p:set>
+                                      <p:cBhvr>
+                                        <p:cTn id="27" dur="1" fill="hold">
+                                          <p:stCondLst>
+                                            <p:cond delay="0"/>
+                                          </p:stCondLst>
+                                        </p:cTn>
+                                        <p:tgtEl>
+                                          <p:spTgt spid="13"/>
+                                        </p:tgtEl>
+                                        <p:attrNameLst>
+                                          <p:attrName>style.visibility</p:attrName>
+                                        </p:attrNameLst>
+                                      </p:cBhvr>
+                                      <p:to>
+                                        <p:strVal val="visible"/>
+                                      </p:to>
+                                    </p:set>
+                                    <p:animEffect transition="in" filter="fade">
+                                      <p:cBhvr>
+                                        <p:cTn id="28" dur="550"/>
+                                        <p:tgtEl>
+                                          <p:spTgt spid="13"/>
+                                        </p:tgtEl>
+                                      </p:cBhvr>
+                                    </p:animEffect>
+                                    <p:anim calcmode="lin" valueType="num">
+                                      <p:cBhvr additive="base">
+                                        <p:cTn id="29" dur="550" fill="hold"/>
+                                        <p:tgtEl>
+                                          <p:spTgt spid="13"/>
+                                        </p:tgtEl>
+                                        <p:attrNameLst>
+                                          <p:attrName>ppt_x</p:attrName>
+                                        </p:attrNameLst>
+                                      </p:cBhvr>
+                                      <p:tavLst>
+                                        <p:tav tm="0">
+                                          <p:val>
+                                            <p:strVal val="#ppt_x"/>
+                                          </p:val>
+                                        </p:tav>
+                                        <p:tav tm="100000">
+                                          <p:val>
+                                            <p:strVal val="#ppt_x"/>
+                                          </p:val>
+                                        </p:tav>
+                                      </p:tavLst>
+                                    </p:anim>
+                                    <p:anim calcmode="lin" valueType="num">
+                                      <p:cBhvr additive="base">
+                                        <p:cTn id="30" dur="550" fill="hold"/>
+                                        <p:tgtEl>
+                                          <p:spTgt spid="13"/>
+                                        </p:tgtEl>
+                                        <p:attrNameLst>
+                                          <p:attrName>ppt_y</p:attrName>
+                                        </p:attrNameLst>
+                                      </p:cBhvr>
+                                      <p:tavLst>
+                                        <p:tav tm="0">
+                                          <p:val>
+                                            <p:strVal val="#ppt_y+.08"/>
+                                          </p:val>
+                                        </p:tav>
+                                        <p:tav tm="100000">
+                                          <p:val>
+                                            <p:strVal val="#ppt_y"/>
+                                          </p:val>
+                                        </p:tav>
+                                      </p:tavLst>
+                                    </p:anim>
+                                  </p:childTnLst>
+                                </p:cTn>
+                              </p:par>
+                            </p:childTnLst>
+                          </p:cTn>
+                        </p:par>
+                      </p:childTnLst>
+                    </p:cTn>
+                  </p:par>
+                </p:childTnLst>
+              </p:cTn>
+              <p:prevCondLst>
+                <p:cond evt="onPrev" delay="0">
+                  <p:tgtEl>
+                    <p:sldTgt/>
+                  </p:tgtEl>
+                </p:cond>
+              </p:prevCondLst>
+              <p:nextCondLst>
+                <p:cond evt="onNext" delay="0">
+                  <p:tgtEl>
+                    <p:sldTgt/>
+                  </p:tgtEl>
+                </p:cond>
+              </p:nextCondLst>
+            </p:seq>
+          </p:childTnLst>
+        </p:cTn>
+      </p:par>
+    </p:tnLst>
+    <p:bldLst>
+      <p:bldP spid="6" grpId="0" animBg="1"/>
+      <p:bldP spid="10" grpId="0" animBg="1"/>
+      <p:bldP spid="11" grpId="0" animBg="1"/>
+      <p:bldP spid="12" grpId="0" animBg="1"/>
+      <p:bldP spid="13" grpId="0" animBg="1"/>
+    </p:bldLst>
+  </p:timing>
+</p:sld>
+</file>
+
+<file path=ppt/slides/slide13.xml><?xml version="1.0" encoding="utf-8"?>
+<p:sld xmlns:a="http://schemas.openxmlformats.org/drawingml/2006/main" xmlns:p="http://schemas.openxmlformats.org/presentationml/2006/main" xmlns:r="http://schemas.openxmlformats.org/officeDocument/2006/relationships">
+  <p:cSld>
+    <p:spTree>
+      <p:nvGrpSpPr>
+        <p:cNvPr id="1" name=""/>
+        <p:cNvGrpSpPr/>
+        <p:nvPr/>
+      </p:nvGrpSpPr>
+      <p:grpSpPr/>
+      <p:sp>
+        <p:nvSpPr>
+          <p:cNvPr id="2" name="Rectangle 1"/>
+          <p:cNvSpPr/>
+          <p:nvPr/>
+        </p:nvSpPr>
+        <p:spPr>
+          <a:xfrm>
+            <a:off x="0" y="0"/>
             <a:ext cx="12192000" cy="6858000"/>
           </a:xfrm>
           <a:prstGeom prst="rect">
@@ -12111,7 +12767,7 @@
 </p:sld>
 </file>
 
-<file path=ppt/slides/slide13.xml><?xml version="1.0" encoding="utf-8"?>
+<file path=ppt/slides/slide14.xml><?xml version="1.0" encoding="utf-8"?>
 <p:sld xmlns:a="http://schemas.openxmlformats.org/drawingml/2006/main" xmlns:p="http://schemas.openxmlformats.org/presentationml/2006/main" xmlns:r="http://schemas.openxmlformats.org/officeDocument/2006/relationships">
   <p:cSld>
     <p:spTree>
@@ -12440,7 +13096,7 @@
                 </a:solidFill>
                 <a:latin typeface="Calibri"/>
               </a:rPr>
-              <a:t>13</a:t>
+              <a:t>14</a:t>
             </a:r>
           </a:p>
         </p:txBody>
@@ -12453,12 +13109,12 @@
         </p:nvSpPr>
         <p:spPr>
           <a:xfrm>
-            <a:off x="550000" y="2076666"/>
-            <a:ext cx="11100000" cy="1250000"/>
+            <a:off x="550000" y="2132700"/>
+            <a:ext cx="11100000" cy="1587300"/>
           </a:xfrm>
           <a:prstGeom prst="roundRect">
             <a:avLst>
-              <a:gd name="adj" fmla="val 18000"/>
+              <a:gd name="adj" fmla="val 8000"/>
             </a:avLst>
           </a:prstGeom>
           <a:solidFill>
@@ -12499,8 +13155,8 @@
         </p:nvSpPr>
         <p:spPr>
           <a:xfrm>
-            <a:off x="550000" y="2076666"/>
-            <a:ext cx="70000" cy="1250000"/>
+            <a:off x="550000" y="2132700"/>
+            <a:ext cx="70000" cy="1587300"/>
           </a:xfrm>
           <a:prstGeom prst="rect">
             <a:avLst/>
@@ -12543,8 +13199,8 @@
         </p:nvSpPr>
         <p:spPr>
           <a:xfrm>
-            <a:off x="800000" y="2471666"/>
-            <a:ext cx="460000" cy="460000"/>
+            <a:off x="780000" y="2716350"/>
+            <a:ext cx="420000" cy="420000"/>
           </a:xfrm>
           <a:prstGeom prst="ellipse">
             <a:avLst/>
@@ -12577,7 +13233,7 @@
           <a:p>
             <a:pPr algn="ctr"/>
             <a:r>
-              <a:rPr sz="1600" b="1">
+              <a:rPr sz="1400" b="1">
                 <a:solidFill>
                   <a:srgbClr val="FFFFFF"/>
                 </a:solidFill>
@@ -12596,8 +13252,8 @@
         </p:nvSpPr>
         <p:spPr>
           <a:xfrm>
-            <a:off x="1450000" y="2076666"/>
-            <a:ext cx="10050000" cy="1250000"/>
+            <a:off x="1380000" y="2172700"/>
+            <a:ext cx="10150000" cy="1507300"/>
           </a:xfrm>
           <a:prstGeom prst="rect">
             <a:avLst/>
@@ -12605,20 +13261,19 @@
           <a:noFill/>
         </p:spPr>
         <p:txBody>
-          <a:bodyPr wrap="square" anchor="ctr" lIns="50800" rIns="50800">
+          <a:bodyPr wrap="square" anchor="ctr">
             <a:spAutoFit/>
           </a:bodyPr>
           <a:lstStyle/>
           <a:p>
-            <a:pPr algn="l"/>
             <a:r>
-              <a:rPr sz="1600" b="0">
+              <a:rPr sz="1500" b="0">
                 <a:solidFill>
                   <a:srgbClr val="1B2430"/>
                 </a:solidFill>
                 <a:latin typeface="Calibri"/>
               </a:rPr>
-              <a:t>Avtonom hisoblash (autonomic computing) g'oyasini 2001-yilda IBM ilgari surgan; Kephart va Chess (2003) uni to'rtta «o'z-o'zini» xususiyati orqali ta'riflagan: o'z-o'zini sozlash (self-configuration), o'z-o'zini optimallashtirish (self-optimization),…</a:t>
+              <a:t>Avtonom hisoblash (autonomic computing) g'oyasini 2001-yilda IBM ilgari surgan; Kephart va Chess (2003) uni to'rtta «o'z-o'zini» xususiyati orqali ta'riflagan: o'z-o'zini sozlash (self-configuration), o'z-o'zini optimallashtirish (self-optimization)…</a:t>
             </a:r>
           </a:p>
         </p:txBody>
@@ -12631,12 +13286,12 @@
         </p:nvSpPr>
         <p:spPr>
           <a:xfrm>
-            <a:off x="550000" y="3446666"/>
-            <a:ext cx="11100000" cy="1250000"/>
+            <a:off x="550000" y="3830000"/>
+            <a:ext cx="11100000" cy="1587300"/>
           </a:xfrm>
           <a:prstGeom prst="roundRect">
             <a:avLst>
-              <a:gd name="adj" fmla="val 18000"/>
+              <a:gd name="adj" fmla="val 8000"/>
             </a:avLst>
           </a:prstGeom>
           <a:solidFill>
@@ -12677,8 +13332,8 @@
         </p:nvSpPr>
         <p:spPr>
           <a:xfrm>
-            <a:off x="550000" y="3446666"/>
-            <a:ext cx="70000" cy="1250000"/>
+            <a:off x="550000" y="3830000"/>
+            <a:ext cx="70000" cy="1587300"/>
           </a:xfrm>
           <a:prstGeom prst="rect">
             <a:avLst/>
@@ -12721,8 +13376,8 @@
         </p:nvSpPr>
         <p:spPr>
           <a:xfrm>
-            <a:off x="800000" y="3841666"/>
-            <a:ext cx="460000" cy="460000"/>
+            <a:off x="780000" y="4413650"/>
+            <a:ext cx="420000" cy="420000"/>
           </a:xfrm>
           <a:prstGeom prst="ellipse">
             <a:avLst/>
@@ -12755,7 +13410,7 @@
           <a:p>
             <a:pPr algn="ctr"/>
             <a:r>
-              <a:rPr sz="1600" b="1">
+              <a:rPr sz="1400" b="1">
                 <a:solidFill>
                   <a:srgbClr val="FFFFFF"/>
                 </a:solidFill>
@@ -12774,8 +13429,8 @@
         </p:nvSpPr>
         <p:spPr>
           <a:xfrm>
-            <a:off x="1450000" y="3446666"/>
-            <a:ext cx="10050000" cy="1250000"/>
+            <a:off x="1380000" y="3870000"/>
+            <a:ext cx="10150000" cy="1507300"/>
           </a:xfrm>
           <a:prstGeom prst="rect">
             <a:avLst/>
@@ -12783,20 +13438,35 @@
           <a:noFill/>
         </p:spPr>
         <p:txBody>
-          <a:bodyPr wrap="square" anchor="ctr" lIns="50800" rIns="50800">
+          <a:bodyPr wrap="square" anchor="ctr">
             <a:spAutoFit/>
           </a:bodyPr>
           <a:lstStyle/>
           <a:p>
-            <a:pPr algn="l"/>
             <a:r>
-              <a:rPr sz="1600" b="0">
+              <a:rPr sz="1600" b="1">
                 <a:solidFill>
-                  <a:srgbClr val="1B2430"/>
+                  <a:srgbClr val="1F3A5F"/>
                 </a:solidFill>
                 <a:latin typeface="Calibri"/>
               </a:rPr>
-              <a:t>MAPE-K halqasi bilan raqamli egizak o'rtasidagi bog'liqlik bevosita: egizak — bu halqaning Knowledge va Analyze qismining materiallashgan ko'rinishi. Avtonomlik darajasini belgilashda SAE J3016 ga o'xshash shkala foydali: 0 — faqat ko'rsatish; 1 — tavsiya,…</a:t>
+              <a:t>MAPE-K halqasi bilan raqamli egizak o'rtasidagi bog'liqlik bevosita: egizak — bu halqaning Knowledge va Analyze qismining materiallashgan ko'rinishi.</a:t>
+            </a:r>
+          </a:p>
+          <a:p>
+            <a:pPr>
+              <a:spcBef>
+                <a:spcPts val="400"/>
+              </a:spcBef>
+            </a:pPr>
+            <a:r>
+              <a:rPr sz="1500">
+                <a:solidFill>
+                  <a:srgbClr val="334055"/>
+                </a:solidFill>
+                <a:latin typeface="Calibri"/>
+              </a:rPr>
+              <a:t>Avtonomlik darajasini belgilashda SAE J3016 ga o'xshash shkala foydali: 0 — faqat ko'rsatish; 1 — tavsiya, inson tasdiqlaydi; 2 — tizim bajaradi, inson kuzatadi va bekor qila oladi (human-on-the-loop); 3 — tizim bajaradi, insonga faqat hisobot beradi; 4 — to'liq avtonom.</a:t>
             </a:r>
           </a:p>
         </p:txBody>
@@ -13629,7 +14299,7 @@
 </p:sld>
 </file>
 
-<file path=ppt/slides/slide14.xml><?xml version="1.0" encoding="utf-8"?>
+<file path=ppt/slides/slide15.xml><?xml version="1.0" encoding="utf-8"?>
 <p:sld xmlns:a="http://schemas.openxmlformats.org/drawingml/2006/main" xmlns:p="http://schemas.openxmlformats.org/presentationml/2006/main" xmlns:r="http://schemas.openxmlformats.org/officeDocument/2006/relationships">
   <p:cSld>
     <p:spTree>
@@ -14541,7 +15211,7 @@
 </p:sld>
 </file>
 
-<file path=ppt/slides/slide15.xml><?xml version="1.0" encoding="utf-8"?>
+<file path=ppt/slides/slide16.xml><?xml version="1.0" encoding="utf-8"?>
 <p:sld xmlns:a="http://schemas.openxmlformats.org/drawingml/2006/main" xmlns:p="http://schemas.openxmlformats.org/presentationml/2006/main" xmlns:r="http://schemas.openxmlformats.org/officeDocument/2006/relationships">
   <p:cSld>
     <p:spTree>
@@ -14870,7 +15540,7 @@
                 </a:solidFill>
                 <a:latin typeface="Calibri"/>
               </a:rPr>
-              <a:t>15</a:t>
+              <a:t>16</a:t>
             </a:r>
           </a:p>
         </p:txBody>
@@ -14883,12 +15553,12 @@
         </p:nvSpPr>
         <p:spPr>
           <a:xfrm>
-            <a:off x="550000" y="2076666"/>
-            <a:ext cx="11100000" cy="1250000"/>
+            <a:off x="550000" y="2384160"/>
+            <a:ext cx="11100000" cy="1335840"/>
           </a:xfrm>
           <a:prstGeom prst="roundRect">
             <a:avLst>
-              <a:gd name="adj" fmla="val 18000"/>
+              <a:gd name="adj" fmla="val 8000"/>
             </a:avLst>
           </a:prstGeom>
           <a:solidFill>
@@ -14929,8 +15599,8 @@
         </p:nvSpPr>
         <p:spPr>
           <a:xfrm>
-            <a:off x="550000" y="2076666"/>
-            <a:ext cx="70000" cy="1250000"/>
+            <a:off x="550000" y="2384160"/>
+            <a:ext cx="70000" cy="1335840"/>
           </a:xfrm>
           <a:prstGeom prst="rect">
             <a:avLst/>
@@ -14973,8 +15643,8 @@
         </p:nvSpPr>
         <p:spPr>
           <a:xfrm>
-            <a:off x="800000" y="2471666"/>
-            <a:ext cx="460000" cy="460000"/>
+            <a:off x="780000" y="2842080"/>
+            <a:ext cx="420000" cy="420000"/>
           </a:xfrm>
           <a:prstGeom prst="ellipse">
             <a:avLst/>
@@ -15007,7 +15677,7 @@
           <a:p>
             <a:pPr algn="ctr"/>
             <a:r>
-              <a:rPr sz="1600" b="1">
+              <a:rPr sz="1400" b="1">
                 <a:solidFill>
                   <a:srgbClr val="FFFFFF"/>
                 </a:solidFill>
@@ -15026,8 +15696,8 @@
         </p:nvSpPr>
         <p:spPr>
           <a:xfrm>
-            <a:off x="1450000" y="2076666"/>
-            <a:ext cx="10050000" cy="1250000"/>
+            <a:off x="1380000" y="2424160"/>
+            <a:ext cx="10150000" cy="1255840"/>
           </a:xfrm>
           <a:prstGeom prst="rect">
             <a:avLst/>
@@ -15035,20 +15705,35 @@
           <a:noFill/>
         </p:spPr>
         <p:txBody>
-          <a:bodyPr wrap="square" anchor="ctr" lIns="50800" rIns="50800">
+          <a:bodyPr wrap="square" anchor="ctr">
             <a:spAutoFit/>
           </a:bodyPr>
           <a:lstStyle/>
           <a:p>
-            <a:pPr algn="l"/>
             <a:r>
-              <a:rPr sz="1600" b="0">
+              <a:rPr sz="1600" b="1">
                 <a:solidFill>
-                  <a:srgbClr val="1B2430"/>
+                  <a:srgbClr val="1F3A5F"/>
                 </a:solidFill>
                 <a:latin typeface="Calibri"/>
               </a:rPr>
-              <a:t>Qaror qabul qilishni qo'llab-quvvatlovchi tizim (Decision Support System, DSS) klassik ta'rifga ko'ra uch komponentdan iborat: ma'lumotlar bazasi, modellar bazasi va foydalanuvchi interfeysi. Intellektual DSS da modellar bazasiga ML modellari, bilimga…</a:t>
+              <a:t>Qaror qabul qilishni qo'llab-quvvatlovchi tizim (Decision Support System, DSS) klassik ta'rifga ko'ra uch komponentdan iborat: ma'lumotlar bazasi, modellar bazasi va foydalanuvchi interfeysi.</a:t>
+            </a:r>
+          </a:p>
+          <a:p>
+            <a:pPr>
+              <a:spcBef>
+                <a:spcPts val="400"/>
+              </a:spcBef>
+            </a:pPr>
+            <a:r>
+              <a:rPr sz="1500">
+                <a:solidFill>
+                  <a:srgbClr val="334055"/>
+                </a:solidFill>
+                <a:latin typeface="Calibri"/>
+              </a:rPr>
+              <a:t>Intellektual DSS da modellar bazasiga ML modellari, bilimga asoslangan qoidalar va optimallashtirish modellari kiradi. Sanoat amaliyotida DSS loyihalashning uchta muhim jihati bor.</a:t>
             </a:r>
           </a:p>
         </p:txBody>
@@ -15061,12 +15746,12 @@
         </p:nvSpPr>
         <p:spPr>
           <a:xfrm>
-            <a:off x="550000" y="3446666"/>
-            <a:ext cx="11100000" cy="1250000"/>
+            <a:off x="550000" y="3830000"/>
+            <a:ext cx="11100000" cy="1335840"/>
           </a:xfrm>
           <a:prstGeom prst="roundRect">
             <a:avLst>
-              <a:gd name="adj" fmla="val 18000"/>
+              <a:gd name="adj" fmla="val 8000"/>
             </a:avLst>
           </a:prstGeom>
           <a:solidFill>
@@ -15107,8 +15792,8 @@
         </p:nvSpPr>
         <p:spPr>
           <a:xfrm>
-            <a:off x="550000" y="3446666"/>
-            <a:ext cx="70000" cy="1250000"/>
+            <a:off x="550000" y="3830000"/>
+            <a:ext cx="70000" cy="1335840"/>
           </a:xfrm>
           <a:prstGeom prst="rect">
             <a:avLst/>
@@ -15151,8 +15836,8 @@
         </p:nvSpPr>
         <p:spPr>
           <a:xfrm>
-            <a:off x="800000" y="3841666"/>
-            <a:ext cx="460000" cy="460000"/>
+            <a:off x="780000" y="4287920"/>
+            <a:ext cx="420000" cy="420000"/>
           </a:xfrm>
           <a:prstGeom prst="ellipse">
             <a:avLst/>
@@ -15185,7 +15870,7 @@
           <a:p>
             <a:pPr algn="ctr"/>
             <a:r>
-              <a:rPr sz="1600" b="1">
+              <a:rPr sz="1400" b="1">
                 <a:solidFill>
                   <a:srgbClr val="FFFFFF"/>
                 </a:solidFill>
@@ -15204,8 +15889,8 @@
         </p:nvSpPr>
         <p:spPr>
           <a:xfrm>
-            <a:off x="1450000" y="3446666"/>
-            <a:ext cx="10050000" cy="1250000"/>
+            <a:off x="1380000" y="3870000"/>
+            <a:ext cx="10150000" cy="1255840"/>
           </a:xfrm>
           <a:prstGeom prst="rect">
             <a:avLst/>
@@ -15213,20 +15898,35 @@
           <a:noFill/>
         </p:spPr>
         <p:txBody>
-          <a:bodyPr wrap="square" anchor="ctr" lIns="50800" rIns="50800">
+          <a:bodyPr wrap="square" anchor="ctr">
             <a:spAutoFit/>
           </a:bodyPr>
           <a:lstStyle/>
           <a:p>
-            <a:pPr algn="l"/>
             <a:r>
-              <a:rPr sz="1600" b="0">
+              <a:rPr sz="1600" b="1">
                 <a:solidFill>
-                  <a:srgbClr val="1B2430"/>
+                  <a:srgbClr val="1F3A5F"/>
                 </a:solidFill>
                 <a:latin typeface="Calibri"/>
               </a:rPr>
-              <a:t>Birinchidan, chiqish formati. Operator uchun «anomaliya bali 0,73» hech narsa anglatmaydi; unga «podshipnik tebranishi 48 soat ichida 2,1 marta oshdi, shunga o'xshash 7 holatdan 6 tasida 10 kun ichida podshipnik almashtirilgan; tavsiya: keyingi rejali…</a:t>
+              <a:t>Birinchidan, chiqish formati.</a:t>
+            </a:r>
+          </a:p>
+          <a:p>
+            <a:pPr>
+              <a:spcBef>
+                <a:spcPts val="400"/>
+              </a:spcBef>
+            </a:pPr>
+            <a:r>
+              <a:rPr sz="1500">
+                <a:solidFill>
+                  <a:srgbClr val="334055"/>
+                </a:solidFill>
+                <a:latin typeface="Calibri"/>
+              </a:rPr>
+              <a:t>Operator uchun «anomaliya bali 0,73» hech narsa anglatmaydi; unga «podshipnik tebranishi 48 soat ichida 2,1 marta oshdi, shunga o'xshash 7 holatdan 6 tasida 10 kun ichida podshipnik almashtirilgan; tavsiya: keyingi rejali to'xtashda tekshirish» kerak.</a:t>
             </a:r>
           </a:p>
         </p:txBody>
@@ -16059,7 +16759,7 @@
 </p:sld>
 </file>
 
-<file path=ppt/slides/slide16.xml><?xml version="1.0" encoding="utf-8"?>
+<file path=ppt/slides/slide17.xml><?xml version="1.0" encoding="utf-8"?>
 <p:sld xmlns:a="http://schemas.openxmlformats.org/drawingml/2006/main" xmlns:p="http://schemas.openxmlformats.org/presentationml/2006/main" xmlns:r="http://schemas.openxmlformats.org/officeDocument/2006/relationships">
   <p:cSld>
     <p:spTree>
@@ -16985,8 +17685,8 @@
         </p:nvSpPr>
         <p:spPr>
           <a:xfrm>
-            <a:off x="550000" y="1300000"/>
-            <a:ext cx="11100000" cy="894000"/>
+            <a:off x="550000" y="2255000"/>
+            <a:ext cx="11100000" cy="520000"/>
           </a:xfrm>
           <a:prstGeom prst="roundRect">
             <a:avLst>
@@ -17031,8 +17731,8 @@
         </p:nvSpPr>
         <p:spPr>
           <a:xfrm>
-            <a:off x="550000" y="1300000"/>
-            <a:ext cx="70000" cy="894000"/>
+            <a:off x="550000" y="2255000"/>
+            <a:ext cx="70000" cy="520000"/>
           </a:xfrm>
           <a:prstGeom prst="rect">
             <a:avLst/>
@@ -17075,8 +17775,8 @@
         </p:nvSpPr>
         <p:spPr>
           <a:xfrm>
-            <a:off x="800000" y="1517000"/>
-            <a:ext cx="460000" cy="460000"/>
+            <a:off x="780000" y="2325000"/>
+            <a:ext cx="380000" cy="380000"/>
           </a:xfrm>
           <a:prstGeom prst="ellipse">
             <a:avLst/>
@@ -17109,7 +17809,7 @@
           <a:p>
             <a:pPr algn="ctr"/>
             <a:r>
-              <a:rPr sz="1600" b="1">
+              <a:rPr sz="1400" b="1">
                 <a:solidFill>
                   <a:srgbClr val="FFFFFF"/>
                 </a:solidFill>
@@ -17128,8 +17828,8 @@
         </p:nvSpPr>
         <p:spPr>
           <a:xfrm>
-            <a:off x="1450000" y="1300000"/>
-            <a:ext cx="10050000" cy="894000"/>
+            <a:off x="1380000" y="2295000"/>
+            <a:ext cx="10150000" cy="440000"/>
           </a:xfrm>
           <a:prstGeom prst="rect">
             <a:avLst/>
@@ -17137,14 +17837,13 @@
           <a:noFill/>
         </p:spPr>
         <p:txBody>
-          <a:bodyPr wrap="square" anchor="ctr" lIns="50800" rIns="50800">
+          <a:bodyPr wrap="square" anchor="ctr">
             <a:spAutoFit/>
           </a:bodyPr>
           <a:lstStyle/>
           <a:p>
-            <a:pPr algn="l"/>
             <a:r>
-              <a:rPr sz="1900" b="0">
+              <a:rPr sz="1600" b="0">
                 <a:solidFill>
                   <a:srgbClr val="1B2430"/>
                 </a:solidFill>
@@ -17163,8 +17862,8 @@
         </p:nvSpPr>
         <p:spPr>
           <a:xfrm>
-            <a:off x="550000" y="2314000"/>
-            <a:ext cx="11100000" cy="894000"/>
+            <a:off x="550000" y="2885000"/>
+            <a:ext cx="11100000" cy="520000"/>
           </a:xfrm>
           <a:prstGeom prst="roundRect">
             <a:avLst>
@@ -17209,8 +17908,8 @@
         </p:nvSpPr>
         <p:spPr>
           <a:xfrm>
-            <a:off x="550000" y="2314000"/>
-            <a:ext cx="70000" cy="894000"/>
+            <a:off x="550000" y="2885000"/>
+            <a:ext cx="70000" cy="520000"/>
           </a:xfrm>
           <a:prstGeom prst="rect">
             <a:avLst/>
@@ -17253,8 +17952,8 @@
         </p:nvSpPr>
         <p:spPr>
           <a:xfrm>
-            <a:off x="800000" y="2531000"/>
-            <a:ext cx="460000" cy="460000"/>
+            <a:off x="780000" y="2955000"/>
+            <a:ext cx="380000" cy="380000"/>
           </a:xfrm>
           <a:prstGeom prst="ellipse">
             <a:avLst/>
@@ -17287,7 +17986,7 @@
           <a:p>
             <a:pPr algn="ctr"/>
             <a:r>
-              <a:rPr sz="1600" b="1">
+              <a:rPr sz="1400" b="1">
                 <a:solidFill>
                   <a:srgbClr val="FFFFFF"/>
                 </a:solidFill>
@@ -17306,8 +18005,8 @@
         </p:nvSpPr>
         <p:spPr>
           <a:xfrm>
-            <a:off x="1450000" y="2314000"/>
-            <a:ext cx="10050000" cy="894000"/>
+            <a:off x="1380000" y="2925000"/>
+            <a:ext cx="10150000" cy="440000"/>
           </a:xfrm>
           <a:prstGeom prst="rect">
             <a:avLst/>
@@ -17315,14 +18014,13 @@
           <a:noFill/>
         </p:spPr>
         <p:txBody>
-          <a:bodyPr wrap="square" anchor="ctr" lIns="50800" rIns="50800">
+          <a:bodyPr wrap="square" anchor="ctr">
             <a:spAutoFit/>
           </a:bodyPr>
           <a:lstStyle/>
           <a:p>
-            <a:pPr algn="l"/>
             <a:r>
-              <a:rPr sz="1900" b="0">
+              <a:rPr sz="1600" b="0">
                 <a:solidFill>
                   <a:srgbClr val="1B2430"/>
                 </a:solidFill>
@@ -17341,8 +18039,8 @@
         </p:nvSpPr>
         <p:spPr>
           <a:xfrm>
-            <a:off x="550000" y="3328000"/>
-            <a:ext cx="11100000" cy="894000"/>
+            <a:off x="550000" y="3515000"/>
+            <a:ext cx="11100000" cy="520000"/>
           </a:xfrm>
           <a:prstGeom prst="roundRect">
             <a:avLst>
@@ -17387,8 +18085,8 @@
         </p:nvSpPr>
         <p:spPr>
           <a:xfrm>
-            <a:off x="550000" y="3328000"/>
-            <a:ext cx="70000" cy="894000"/>
+            <a:off x="550000" y="3515000"/>
+            <a:ext cx="70000" cy="520000"/>
           </a:xfrm>
           <a:prstGeom prst="rect">
             <a:avLst/>
@@ -17431,8 +18129,8 @@
         </p:nvSpPr>
         <p:spPr>
           <a:xfrm>
-            <a:off x="800000" y="3545000"/>
-            <a:ext cx="460000" cy="460000"/>
+            <a:off x="780000" y="3585000"/>
+            <a:ext cx="380000" cy="380000"/>
           </a:xfrm>
           <a:prstGeom prst="ellipse">
             <a:avLst/>
@@ -17465,7 +18163,7 @@
           <a:p>
             <a:pPr algn="ctr"/>
             <a:r>
-              <a:rPr sz="1600" b="1">
+              <a:rPr sz="1400" b="1">
                 <a:solidFill>
                   <a:srgbClr val="FFFFFF"/>
                 </a:solidFill>
@@ -17484,8 +18182,8 @@
         </p:nvSpPr>
         <p:spPr>
           <a:xfrm>
-            <a:off x="1450000" y="3328000"/>
-            <a:ext cx="10050000" cy="894000"/>
+            <a:off x="1380000" y="3555000"/>
+            <a:ext cx="10150000" cy="440000"/>
           </a:xfrm>
           <a:prstGeom prst="rect">
             <a:avLst/>
@@ -17493,14 +18191,13 @@
           <a:noFill/>
         </p:spPr>
         <p:txBody>
-          <a:bodyPr wrap="square" anchor="ctr" lIns="50800" rIns="50800">
+          <a:bodyPr wrap="square" anchor="ctr">
             <a:spAutoFit/>
           </a:bodyPr>
           <a:lstStyle/>
           <a:p>
-            <a:pPr algn="l"/>
             <a:r>
-              <a:rPr sz="1900" b="0">
+              <a:rPr sz="1600" b="0">
                 <a:solidFill>
                   <a:srgbClr val="1B2430"/>
                 </a:solidFill>
@@ -17519,8 +18216,8 @@
         </p:nvSpPr>
         <p:spPr>
           <a:xfrm>
-            <a:off x="550000" y="4342000"/>
-            <a:ext cx="11100000" cy="894000"/>
+            <a:off x="550000" y="4145000"/>
+            <a:ext cx="11100000" cy="520000"/>
           </a:xfrm>
           <a:prstGeom prst="roundRect">
             <a:avLst>
@@ -17565,8 +18262,8 @@
         </p:nvSpPr>
         <p:spPr>
           <a:xfrm>
-            <a:off x="550000" y="4342000"/>
-            <a:ext cx="70000" cy="894000"/>
+            <a:off x="550000" y="4145000"/>
+            <a:ext cx="70000" cy="520000"/>
           </a:xfrm>
           <a:prstGeom prst="rect">
             <a:avLst/>
@@ -17609,8 +18306,8 @@
         </p:nvSpPr>
         <p:spPr>
           <a:xfrm>
-            <a:off x="800000" y="4559000"/>
-            <a:ext cx="460000" cy="460000"/>
+            <a:off x="780000" y="4215000"/>
+            <a:ext cx="380000" cy="380000"/>
           </a:xfrm>
           <a:prstGeom prst="ellipse">
             <a:avLst/>
@@ -17643,7 +18340,7 @@
           <a:p>
             <a:pPr algn="ctr"/>
             <a:r>
-              <a:rPr sz="1600" b="1">
+              <a:rPr sz="1400" b="1">
                 <a:solidFill>
                   <a:srgbClr val="FFFFFF"/>
                 </a:solidFill>
@@ -17662,8 +18359,8 @@
         </p:nvSpPr>
         <p:spPr>
           <a:xfrm>
-            <a:off x="1450000" y="4342000"/>
-            <a:ext cx="10050000" cy="894000"/>
+            <a:off x="1380000" y="4185000"/>
+            <a:ext cx="10150000" cy="440000"/>
           </a:xfrm>
           <a:prstGeom prst="rect">
             <a:avLst/>
@@ -17671,14 +18368,13 @@
           <a:noFill/>
         </p:spPr>
         <p:txBody>
-          <a:bodyPr wrap="square" anchor="ctr" lIns="50800" rIns="50800">
+          <a:bodyPr wrap="square" anchor="ctr">
             <a:spAutoFit/>
           </a:bodyPr>
           <a:lstStyle/>
           <a:p>
-            <a:pPr algn="l"/>
             <a:r>
-              <a:rPr sz="1900" b="0">
+              <a:rPr sz="1600" b="0">
                 <a:solidFill>
                   <a:srgbClr val="1B2430"/>
                 </a:solidFill>
@@ -17697,8 +18393,8 @@
         </p:nvSpPr>
         <p:spPr>
           <a:xfrm>
-            <a:off x="550000" y="5356000"/>
-            <a:ext cx="11100000" cy="894000"/>
+            <a:off x="550000" y="4775000"/>
+            <a:ext cx="11100000" cy="520000"/>
           </a:xfrm>
           <a:prstGeom prst="roundRect">
             <a:avLst>
@@ -17743,8 +18439,8 @@
         </p:nvSpPr>
         <p:spPr>
           <a:xfrm>
-            <a:off x="550000" y="5356000"/>
-            <a:ext cx="70000" cy="894000"/>
+            <a:off x="550000" y="4775000"/>
+            <a:ext cx="70000" cy="520000"/>
           </a:xfrm>
           <a:prstGeom prst="rect">
             <a:avLst/>
@@ -17787,8 +18483,8 @@
         </p:nvSpPr>
         <p:spPr>
           <a:xfrm>
-            <a:off x="800000" y="5573000"/>
-            <a:ext cx="460000" cy="460000"/>
+            <a:off x="780000" y="4845000"/>
+            <a:ext cx="380000" cy="380000"/>
           </a:xfrm>
           <a:prstGeom prst="ellipse">
             <a:avLst/>
@@ -17821,7 +18517,7 @@
           <a:p>
             <a:pPr algn="ctr"/>
             <a:r>
-              <a:rPr sz="1600" b="1">
+              <a:rPr sz="1400" b="1">
                 <a:solidFill>
                   <a:srgbClr val="FFFFFF"/>
                 </a:solidFill>
@@ -17840,8 +18536,8 @@
         </p:nvSpPr>
         <p:spPr>
           <a:xfrm>
-            <a:off x="1450000" y="5356000"/>
-            <a:ext cx="10050000" cy="894000"/>
+            <a:off x="1380000" y="4815000"/>
+            <a:ext cx="10150000" cy="440000"/>
           </a:xfrm>
           <a:prstGeom prst="rect">
             <a:avLst/>
@@ -17849,14 +18545,13 @@
           <a:noFill/>
         </p:spPr>
         <p:txBody>
-          <a:bodyPr wrap="square" anchor="ctr" lIns="50800" rIns="50800">
+          <a:bodyPr wrap="square" anchor="ctr">
             <a:spAutoFit/>
           </a:bodyPr>
           <a:lstStyle/>
           <a:p>
-            <a:pPr algn="l"/>
             <a:r>
-              <a:rPr sz="1900" b="0">
+              <a:rPr sz="1600" b="0">
                 <a:solidFill>
                   <a:srgbClr val="1B2430"/>
                 </a:solidFill>
@@ -21041,12 +21736,12 @@
         </p:nvSpPr>
         <p:spPr>
           <a:xfrm>
-            <a:off x="550000" y="1620000"/>
-            <a:ext cx="11100000" cy="1250000"/>
+            <a:off x="550000" y="1661240"/>
+            <a:ext cx="11100000" cy="1335840"/>
           </a:xfrm>
           <a:prstGeom prst="roundRect">
             <a:avLst>
-              <a:gd name="adj" fmla="val 18000"/>
+              <a:gd name="adj" fmla="val 8000"/>
             </a:avLst>
           </a:prstGeom>
           <a:solidFill>
@@ -21087,8 +21782,8 @@
         </p:nvSpPr>
         <p:spPr>
           <a:xfrm>
-            <a:off x="550000" y="1620000"/>
-            <a:ext cx="70000" cy="1250000"/>
+            <a:off x="550000" y="1661240"/>
+            <a:ext cx="70000" cy="1335840"/>
           </a:xfrm>
           <a:prstGeom prst="rect">
             <a:avLst/>
@@ -21131,8 +21826,8 @@
         </p:nvSpPr>
         <p:spPr>
           <a:xfrm>
-            <a:off x="800000" y="2015000"/>
-            <a:ext cx="460000" cy="460000"/>
+            <a:off x="780000" y="2119160"/>
+            <a:ext cx="420000" cy="420000"/>
           </a:xfrm>
           <a:prstGeom prst="ellipse">
             <a:avLst/>
@@ -21165,7 +21860,7 @@
           <a:p>
             <a:pPr algn="ctr"/>
             <a:r>
-              <a:rPr sz="1600" b="1">
+              <a:rPr sz="1400" b="1">
                 <a:solidFill>
                   <a:srgbClr val="FFFFFF"/>
                 </a:solidFill>
@@ -21184,8 +21879,8 @@
         </p:nvSpPr>
         <p:spPr>
           <a:xfrm>
-            <a:off x="1450000" y="1620000"/>
-            <a:ext cx="10050000" cy="1250000"/>
+            <a:off x="1380000" y="1701240"/>
+            <a:ext cx="10150000" cy="1255840"/>
           </a:xfrm>
           <a:prstGeom prst="rect">
             <a:avLst/>
@@ -21193,14 +21888,13 @@
           <a:noFill/>
         </p:spPr>
         <p:txBody>
-          <a:bodyPr wrap="square" anchor="ctr" lIns="50800" rIns="50800">
+          <a:bodyPr wrap="square" anchor="ctr">
             <a:spAutoFit/>
           </a:bodyPr>
           <a:lstStyle/>
           <a:p>
-            <a:pPr algn="l"/>
             <a:r>
-              <a:rPr sz="1600" b="0">
+              <a:rPr sz="1500" b="0">
                 <a:solidFill>
                   <a:srgbClr val="1B2430"/>
                 </a:solidFill>
@@ -21219,12 +21913,12 @@
         </p:nvSpPr>
         <p:spPr>
           <a:xfrm>
-            <a:off x="550000" y="2990000"/>
-            <a:ext cx="11100000" cy="1250000"/>
+            <a:off x="550000" y="3107080"/>
+            <a:ext cx="11100000" cy="1335840"/>
           </a:xfrm>
           <a:prstGeom prst="roundRect">
             <a:avLst>
-              <a:gd name="adj" fmla="val 18000"/>
+              <a:gd name="adj" fmla="val 8000"/>
             </a:avLst>
           </a:prstGeom>
           <a:solidFill>
@@ -21265,8 +21959,8 @@
         </p:nvSpPr>
         <p:spPr>
           <a:xfrm>
-            <a:off x="550000" y="2990000"/>
-            <a:ext cx="70000" cy="1250000"/>
+            <a:off x="550000" y="3107080"/>
+            <a:ext cx="70000" cy="1335840"/>
           </a:xfrm>
           <a:prstGeom prst="rect">
             <a:avLst/>
@@ -21309,8 +22003,8 @@
         </p:nvSpPr>
         <p:spPr>
           <a:xfrm>
-            <a:off x="800000" y="3385000"/>
-            <a:ext cx="460000" cy="460000"/>
+            <a:off x="780000" y="3565000"/>
+            <a:ext cx="420000" cy="420000"/>
           </a:xfrm>
           <a:prstGeom prst="ellipse">
             <a:avLst/>
@@ -21343,7 +22037,7 @@
           <a:p>
             <a:pPr algn="ctr"/>
             <a:r>
-              <a:rPr sz="1600" b="1">
+              <a:rPr sz="1400" b="1">
                 <a:solidFill>
                   <a:srgbClr val="FFFFFF"/>
                 </a:solidFill>
@@ -21362,8 +22056,8 @@
         </p:nvSpPr>
         <p:spPr>
           <a:xfrm>
-            <a:off x="1450000" y="2990000"/>
-            <a:ext cx="10050000" cy="1250000"/>
+            <a:off x="1380000" y="3147080"/>
+            <a:ext cx="10150000" cy="1255840"/>
           </a:xfrm>
           <a:prstGeom prst="rect">
             <a:avLst/>
@@ -21371,20 +22065,35 @@
           <a:noFill/>
         </p:spPr>
         <p:txBody>
-          <a:bodyPr wrap="square" anchor="ctr" lIns="50800" rIns="50800">
+          <a:bodyPr wrap="square" anchor="ctr">
             <a:spAutoFit/>
           </a:bodyPr>
           <a:lstStyle/>
           <a:p>
-            <a:pPr algn="l"/>
             <a:r>
-              <a:rPr sz="1600" b="0">
+              <a:rPr sz="1600" b="1">
                 <a:solidFill>
-                  <a:srgbClr val="1B2430"/>
+                  <a:srgbClr val="1F3A5F"/>
                 </a:solidFill>
                 <a:latin typeface="Calibri"/>
               </a:rPr>
-              <a:t>Arxitekturani odatda uch «ufq» bo'yicha taqsimlaydilar. Chekka (edge) ufqida sensorlarga yaqin joylashgan mikrokontrollerlar, dasturlanadigan mantiqiy kontrollerlar (PLC) va Jetson Orin, Intel Core Ultra NPU kabi chekka tezlatkichlar millisekund darajasidagi…</a:t>
+              <a:t>Arxitekturani odatda uch «ufq» bo'yicha taqsimlaydilar.</a:t>
+            </a:r>
+          </a:p>
+          <a:p>
+            <a:pPr>
+              <a:spcBef>
+                <a:spcPts val="400"/>
+              </a:spcBef>
+            </a:pPr>
+            <a:r>
+              <a:rPr sz="1500">
+                <a:solidFill>
+                  <a:srgbClr val="334055"/>
+                </a:solidFill>
+                <a:latin typeface="Calibri"/>
+              </a:rPr>
+              <a:t>Chekka (edge) ufqida sensorlarga yaqin joylashgan mikrokontrollerlar, dasturlanadigan mantiqiy kontrollerlar (PLC) va Jetson Orin, Intel Core Ultra NPU kabi chekka tezlatkichlar millisekund darajasidagi reaksiyani ta'minlaydi.</a:t>
             </a:r>
           </a:p>
         </p:txBody>
@@ -21397,12 +22106,12 @@
         </p:nvSpPr>
         <p:spPr>
           <a:xfrm>
-            <a:off x="550000" y="4360000"/>
-            <a:ext cx="11100000" cy="1250000"/>
+            <a:off x="550000" y="4552920"/>
+            <a:ext cx="11100000" cy="1335840"/>
           </a:xfrm>
           <a:prstGeom prst="roundRect">
             <a:avLst>
-              <a:gd name="adj" fmla="val 18000"/>
+              <a:gd name="adj" fmla="val 8000"/>
             </a:avLst>
           </a:prstGeom>
           <a:solidFill>
@@ -21443,8 +22152,8 @@
         </p:nvSpPr>
         <p:spPr>
           <a:xfrm>
-            <a:off x="550000" y="4360000"/>
-            <a:ext cx="70000" cy="1250000"/>
+            <a:off x="550000" y="4552920"/>
+            <a:ext cx="70000" cy="1335840"/>
           </a:xfrm>
           <a:prstGeom prst="rect">
             <a:avLst/>
@@ -21487,8 +22196,8 @@
         </p:nvSpPr>
         <p:spPr>
           <a:xfrm>
-            <a:off x="800000" y="4755000"/>
-            <a:ext cx="460000" cy="460000"/>
+            <a:off x="780000" y="5010840"/>
+            <a:ext cx="420000" cy="420000"/>
           </a:xfrm>
           <a:prstGeom prst="ellipse">
             <a:avLst/>
@@ -21521,7 +22230,7 @@
           <a:p>
             <a:pPr algn="ctr"/>
             <a:r>
-              <a:rPr sz="1600" b="1">
+              <a:rPr sz="1400" b="1">
                 <a:solidFill>
                   <a:srgbClr val="FFFFFF"/>
                 </a:solidFill>
@@ -21540,8 +22249,8 @@
         </p:nvSpPr>
         <p:spPr>
           <a:xfrm>
-            <a:off x="1450000" y="4360000"/>
-            <a:ext cx="10050000" cy="1250000"/>
+            <a:off x="1380000" y="4592920"/>
+            <a:ext cx="10150000" cy="1255840"/>
           </a:xfrm>
           <a:prstGeom prst="rect">
             <a:avLst/>
@@ -21549,20 +22258,35 @@
           <a:noFill/>
         </p:spPr>
         <p:txBody>
-          <a:bodyPr wrap="square" anchor="ctr" lIns="50800" rIns="50800">
+          <a:bodyPr wrap="square" anchor="ctr">
             <a:spAutoFit/>
           </a:bodyPr>
           <a:lstStyle/>
           <a:p>
-            <a:pPr algn="l"/>
             <a:r>
-              <a:rPr sz="1600" b="0">
+              <a:rPr sz="1600" b="1">
                 <a:solidFill>
-                  <a:srgbClr val="1B2430"/>
+                  <a:srgbClr val="1F3A5F"/>
                 </a:solidFill>
                 <a:latin typeface="Calibri"/>
               </a:rPr>
-              <a:t>Tizimni baholashning asosiy mezonlari quyidagi jadvalda keltirilgan. E'tibor bering, bu yerda «aniqlik» (accuracy) faqat bitta ustun — sanoat tizimida qolgan mezonlar ko'pincha undan muhimroq bo'ladi.</a:t>
+              <a:t>Tizimni baholashning asosiy mezonlari quyidagi jadvalda keltirilgan.</a:t>
+            </a:r>
+          </a:p>
+          <a:p>
+            <a:pPr>
+              <a:spcBef>
+                <a:spcPts val="400"/>
+              </a:spcBef>
+            </a:pPr>
+            <a:r>
+              <a:rPr sz="1500">
+                <a:solidFill>
+                  <a:srgbClr val="334055"/>
+                </a:solidFill>
+                <a:latin typeface="Calibri"/>
+              </a:rPr>
+              <a:t>E'tibor bering, bu yerda «aniqlik» (accuracy) faqat bitta ustun — sanoat tizimida qolgan mezonlar ko'pincha undan muhimroq bo'ladi.</a:t>
             </a:r>
           </a:p>
         </p:txBody>
@@ -24994,12 +25718,12 @@
         </p:nvSpPr>
         <p:spPr>
           <a:xfrm>
-            <a:off x="550000" y="1620000"/>
-            <a:ext cx="11100000" cy="1250000"/>
+            <a:off x="550000" y="1284050"/>
+            <a:ext cx="11100000" cy="1587300"/>
           </a:xfrm>
           <a:prstGeom prst="roundRect">
             <a:avLst>
-              <a:gd name="adj" fmla="val 18000"/>
+              <a:gd name="adj" fmla="val 8000"/>
             </a:avLst>
           </a:prstGeom>
           <a:solidFill>
@@ -25040,8 +25764,8 @@
         </p:nvSpPr>
         <p:spPr>
           <a:xfrm>
-            <a:off x="550000" y="1620000"/>
-            <a:ext cx="70000" cy="1250000"/>
+            <a:off x="550000" y="1284050"/>
+            <a:ext cx="70000" cy="1587300"/>
           </a:xfrm>
           <a:prstGeom prst="rect">
             <a:avLst/>
@@ -25084,8 +25808,8 @@
         </p:nvSpPr>
         <p:spPr>
           <a:xfrm>
-            <a:off x="800000" y="2015000"/>
-            <a:ext cx="460000" cy="460000"/>
+            <a:off x="780000" y="1867700"/>
+            <a:ext cx="420000" cy="420000"/>
           </a:xfrm>
           <a:prstGeom prst="ellipse">
             <a:avLst/>
@@ -25118,7 +25842,7 @@
           <a:p>
             <a:pPr algn="ctr"/>
             <a:r>
-              <a:rPr sz="1600" b="1">
+              <a:rPr sz="1400" b="1">
                 <a:solidFill>
                   <a:srgbClr val="FFFFFF"/>
                 </a:solidFill>
@@ -25137,8 +25861,8 @@
         </p:nvSpPr>
         <p:spPr>
           <a:xfrm>
-            <a:off x="1450000" y="1620000"/>
-            <a:ext cx="10050000" cy="1250000"/>
+            <a:off x="1380000" y="1324050"/>
+            <a:ext cx="10150000" cy="1507300"/>
           </a:xfrm>
           <a:prstGeom prst="rect">
             <a:avLst/>
@@ -25146,20 +25870,35 @@
           <a:noFill/>
         </p:spPr>
         <p:txBody>
-          <a:bodyPr wrap="square" anchor="ctr" lIns="50800" rIns="50800">
+          <a:bodyPr wrap="square" anchor="ctr">
             <a:spAutoFit/>
           </a:bodyPr>
           <a:lstStyle/>
           <a:p>
-            <a:pPr algn="l"/>
             <a:r>
-              <a:rPr sz="1600" b="0">
+              <a:rPr sz="1600" b="1">
                 <a:solidFill>
-                  <a:srgbClr val="1B2430"/>
+                  <a:srgbClr val="1F3A5F"/>
                 </a:solidFill>
                 <a:latin typeface="Calibri"/>
               </a:rPr>
-              <a:t>«Cyber-Physical Systems» atamasini 2006-yilda AQSh Milliy ilmiy jamg'armasi (NSF) xodimi Helen Gill kiritgan. CPS — bu hisoblash (kiber) va fizik jarayonlarning shunday chambarchas birlashuviki, unda fizik jarayon hisoblashga, hisoblash esa fizik jarayonga…</a:t>
+              <a:t>«Cyber-Physical Systems» atamasini 2006-yilda AQSh Milliy ilmiy jamg'armasi (NSF) xodimi Helen Gill kiritgan.</a:t>
+            </a:r>
+          </a:p>
+          <a:p>
+            <a:pPr>
+              <a:spcBef>
+                <a:spcPts val="400"/>
+              </a:spcBef>
+            </a:pPr>
+            <a:r>
+              <a:rPr sz="1500">
+                <a:solidFill>
+                  <a:srgbClr val="334055"/>
+                </a:solidFill>
+                <a:latin typeface="Calibri"/>
+              </a:rPr>
+              <a:t>CPS — bu hisoblash (kiber) va fizik jarayonlarning shunday chambarchas birlashuviki, unda fizik jarayon hisoblashga, hisoblash esa fizik jarayonga uzluksiz ta'sir qiladi.</a:t>
             </a:r>
           </a:p>
         </p:txBody>
@@ -25172,12 +25911,12 @@
         </p:nvSpPr>
         <p:spPr>
           <a:xfrm>
-            <a:off x="550000" y="2990000"/>
-            <a:ext cx="11100000" cy="1250000"/>
+            <a:off x="550000" y="2981350"/>
+            <a:ext cx="11100000" cy="1587300"/>
           </a:xfrm>
           <a:prstGeom prst="roundRect">
             <a:avLst>
-              <a:gd name="adj" fmla="val 18000"/>
+              <a:gd name="adj" fmla="val 8000"/>
             </a:avLst>
           </a:prstGeom>
           <a:solidFill>
@@ -25218,8 +25957,8 @@
         </p:nvSpPr>
         <p:spPr>
           <a:xfrm>
-            <a:off x="550000" y="2990000"/>
-            <a:ext cx="70000" cy="1250000"/>
+            <a:off x="550000" y="2981350"/>
+            <a:ext cx="70000" cy="1587300"/>
           </a:xfrm>
           <a:prstGeom prst="rect">
             <a:avLst/>
@@ -25262,8 +26001,8 @@
         </p:nvSpPr>
         <p:spPr>
           <a:xfrm>
-            <a:off x="800000" y="3385000"/>
-            <a:ext cx="460000" cy="460000"/>
+            <a:off x="780000" y="3565000"/>
+            <a:ext cx="420000" cy="420000"/>
           </a:xfrm>
           <a:prstGeom prst="ellipse">
             <a:avLst/>
@@ -25296,7 +26035,7 @@
           <a:p>
             <a:pPr algn="ctr"/>
             <a:r>
-              <a:rPr sz="1600" b="1">
+              <a:rPr sz="1400" b="1">
                 <a:solidFill>
                   <a:srgbClr val="FFFFFF"/>
                 </a:solidFill>
@@ -25315,8 +26054,8 @@
         </p:nvSpPr>
         <p:spPr>
           <a:xfrm>
-            <a:off x="1450000" y="2990000"/>
-            <a:ext cx="10050000" cy="1250000"/>
+            <a:off x="1380000" y="3021350"/>
+            <a:ext cx="10150000" cy="1507300"/>
           </a:xfrm>
           <a:prstGeom prst="rect">
             <a:avLst/>
@@ -25324,14 +26063,13 @@
           <a:noFill/>
         </p:spPr>
         <p:txBody>
-          <a:bodyPr wrap="square" anchor="ctr" lIns="50800" rIns="50800">
+          <a:bodyPr wrap="square" anchor="ctr">
             <a:spAutoFit/>
           </a:bodyPr>
           <a:lstStyle/>
           <a:p>
-            <a:pPr algn="l"/>
             <a:r>
-              <a:rPr sz="1600" b="0">
+              <a:rPr sz="1500" b="0">
                 <a:solidFill>
                   <a:srgbClr val="1B2430"/>
                 </a:solidFill>
@@ -25350,12 +26088,12 @@
         </p:nvSpPr>
         <p:spPr>
           <a:xfrm>
-            <a:off x="550000" y="4360000"/>
-            <a:ext cx="11100000" cy="1250000"/>
+            <a:off x="550000" y="4678650"/>
+            <a:ext cx="11100000" cy="1587300"/>
           </a:xfrm>
           <a:prstGeom prst="roundRect">
             <a:avLst>
-              <a:gd name="adj" fmla="val 18000"/>
+              <a:gd name="adj" fmla="val 8000"/>
             </a:avLst>
           </a:prstGeom>
           <a:solidFill>
@@ -25396,8 +26134,8 @@
         </p:nvSpPr>
         <p:spPr>
           <a:xfrm>
-            <a:off x="550000" y="4360000"/>
-            <a:ext cx="70000" cy="1250000"/>
+            <a:off x="550000" y="4678650"/>
+            <a:ext cx="70000" cy="1587300"/>
           </a:xfrm>
           <a:prstGeom prst="rect">
             <a:avLst/>
@@ -25440,8 +26178,8 @@
         </p:nvSpPr>
         <p:spPr>
           <a:xfrm>
-            <a:off x="800000" y="4755000"/>
-            <a:ext cx="460000" cy="460000"/>
+            <a:off x="780000" y="5262300"/>
+            <a:ext cx="420000" cy="420000"/>
           </a:xfrm>
           <a:prstGeom prst="ellipse">
             <a:avLst/>
@@ -25474,7 +26212,7 @@
           <a:p>
             <a:pPr algn="ctr"/>
             <a:r>
-              <a:rPr sz="1600" b="1">
+              <a:rPr sz="1400" b="1">
                 <a:solidFill>
                   <a:srgbClr val="FFFFFF"/>
                 </a:solidFill>
@@ -25493,8 +26231,8 @@
         </p:nvSpPr>
         <p:spPr>
           <a:xfrm>
-            <a:off x="1450000" y="4360000"/>
-            <a:ext cx="10050000" cy="1250000"/>
+            <a:off x="1380000" y="4718650"/>
+            <a:ext cx="10150000" cy="1507300"/>
           </a:xfrm>
           <a:prstGeom prst="rect">
             <a:avLst/>
@@ -25502,20 +26240,35 @@
           <a:noFill/>
         </p:spPr>
         <p:txBody>
-          <a:bodyPr wrap="square" anchor="ctr" lIns="50800" rIns="50800">
+          <a:bodyPr wrap="square" anchor="ctr">
             <a:spAutoFit/>
           </a:bodyPr>
           <a:lstStyle/>
           <a:p>
-            <a:pPr algn="l"/>
             <a:r>
-              <a:rPr sz="1600" b="0">
+              <a:rPr sz="1600" b="1">
                 <a:solidFill>
-                  <a:srgbClr val="1B2430"/>
+                  <a:srgbClr val="1F3A5F"/>
                 </a:solidFill>
                 <a:latin typeface="Calibri"/>
               </a:rPr>
-              <a:t>CPS loyihalashdagi asosiy muhandislik qiyinchiligi — vaqt semantikasi. Dasturiy ta'minotda «hodisa A hodisa B dan oldin bo'ldi» degan tushuncha tarmoq kechikishlari va turli soatlar tufayli noaniq bo'lib qoladi.</a:t>
+              <a:t>CPS loyihalashdagi asosiy muhandislik qiyinchiligi — vaqt semantikasi.</a:t>
+            </a:r>
+          </a:p>
+          <a:p>
+            <a:pPr>
+              <a:spcBef>
+                <a:spcPts val="400"/>
+              </a:spcBef>
+            </a:pPr>
+            <a:r>
+              <a:rPr sz="1500">
+                <a:solidFill>
+                  <a:srgbClr val="334055"/>
+                </a:solidFill>
+                <a:latin typeface="Calibri"/>
+              </a:rPr>
+              <a:t>Dasturiy ta'minotda «hodisa A hodisa B dan oldin bo'ldi» degan tushuncha tarmoq kechikishlari va turli soatlar tufayli noaniq bo'lib qoladi. Shuning uchun sanoat CPS da aniq vaqt sinxronizatsiyasi (IEEE 1588 PTP, IEEE 802.1 TSN) va hodisalar uchun ikki xil vaqt tamg'asi (hodisa vaqti va qabul qilish vaqti) qo'llaniladi.</a:t>
             </a:r>
           </a:p>
         </p:txBody>
